--- a/上瘾自律/课件/上瘾自律_弹性尺专题课件.pptx
+++ b/上瘾自律/课件/上瘾自律_弹性尺专题课件.pptx
@@ -2322,6 +2322,13 @@
           </a:prstGeom>
           <a:noFill/>
           <a:ln/>
+          <a:effectLst>
+            <a:outerShdw sx="100000" sy="100000" kx="0" ky="0" algn="bl" rotWithShape="0" blurRad="177800" dist="25400" dir="5400000">
+              <a:srgbClr val="5A1A00">
+                <a:alpha val="50000"/>
+              </a:srgbClr>
+            </a:outerShdw>
+          </a:effectLst>
         </p:spPr>
         <p:txBody>
           <a:bodyPr wrap="square" lIns="0" tIns="0" rIns="0" bIns="0" rtlCol="0" anchor="ctr"/>
@@ -2361,6 +2368,13 @@
           </a:prstGeom>
           <a:noFill/>
           <a:ln/>
+          <a:effectLst>
+            <a:outerShdw sx="100000" sy="100000" kx="0" ky="0" algn="bl" rotWithShape="0" blurRad="101600" dist="25400" dir="5400000">
+              <a:srgbClr val="5A1A00">
+                <a:alpha val="55000"/>
+              </a:srgbClr>
+            </a:outerShdw>
+          </a:effectLst>
         </p:spPr>
         <p:txBody>
           <a:bodyPr wrap="square" lIns="0" tIns="0" rIns="0" bIns="0" rtlCol="0" anchor="ctr"/>
@@ -2372,7 +2386,7 @@
             <a:r>
               <a:rPr lang="en-US" sz="2300" b="1" dirty="0">
                 <a:solidFill>
-                  <a:srgbClr val="FFC93C"/>
+                  <a:srgbClr val="FFFFFF"/>
                 </a:solidFill>
                 <a:latin typeface="Microsoft YaHei" pitchFamily="34" charset="0"/>
                 <a:ea typeface="Microsoft YaHei" pitchFamily="34" charset="-122"/>
@@ -2400,6 +2414,13 @@
           </a:prstGeom>
           <a:noFill/>
           <a:ln/>
+          <a:effectLst>
+            <a:outerShdw sx="100000" sy="100000" kx="0" ky="0" algn="bl" rotWithShape="0" blurRad="76200" dist="25400" dir="5400000">
+              <a:srgbClr val="5A1A00">
+                <a:alpha val="60000"/>
+              </a:srgbClr>
+            </a:outerShdw>
+          </a:effectLst>
         </p:spPr>
         <p:txBody>
           <a:bodyPr wrap="square" lIns="0" tIns="0" rIns="0" bIns="0" rtlCol="0" anchor="ctr"/>
@@ -2409,9 +2430,9 @@
               <a:buNone/>
             </a:pPr>
             <a:r>
-              <a:rPr lang="en-US" sz="1300" dirty="0">
-                <a:solidFill>
-                  <a:srgbClr val="E8D9C6"/>
+              <a:rPr lang="en-US" sz="1350" b="1" dirty="0">
+                <a:solidFill>
+                  <a:srgbClr val="FFF6E8"/>
                 </a:solidFill>
                 <a:latin typeface="Microsoft YaHei" pitchFamily="34" charset="0"/>
                 <a:ea typeface="Microsoft YaHei" pitchFamily="34" charset="-122"/>
@@ -2419,7 +2440,7 @@
               </a:rPr>
               <a:t>DAY 2 · 9:15 – 10:45</a:t>
             </a:r>
-            <a:endParaRPr lang="en-US" sz="1300" dirty="0"/>
+            <a:endParaRPr lang="en-US" sz="1350" dirty="0"/>
           </a:p>
         </p:txBody>
       </p:sp>
@@ -2439,6 +2460,13 @@
           </a:prstGeom>
           <a:noFill/>
           <a:ln/>
+          <a:effectLst>
+            <a:outerShdw sx="100000" sy="100000" kx="0" ky="0" algn="bl" rotWithShape="0" blurRad="76200" dist="25400" dir="5400000">
+              <a:srgbClr val="5A1A00">
+                <a:alpha val="60000"/>
+              </a:srgbClr>
+            </a:outerShdw>
+          </a:effectLst>
         </p:spPr>
         <p:txBody>
           <a:bodyPr wrap="square" lIns="0" tIns="0" rIns="0" bIns="0" rtlCol="0" anchor="ctr"/>
@@ -2448,9 +2476,9 @@
               <a:buNone/>
             </a:pPr>
             <a:r>
-              <a:rPr lang="en-US" sz="1300" dirty="0">
-                <a:solidFill>
-                  <a:srgbClr val="E8D9C6"/>
+              <a:rPr lang="en-US" sz="1350" b="1" dirty="0">
+                <a:solidFill>
+                  <a:srgbClr val="FFF6E8"/>
                 </a:solidFill>
                 <a:latin typeface="Microsoft YaHei" pitchFamily="34" charset="0"/>
                 <a:ea typeface="Microsoft YaHei" pitchFamily="34" charset="-122"/>
@@ -2458,7 +2486,7 @@
               </a:rPr>
               <a:t>交叉试玩 + 测评</a:t>
             </a:r>
-            <a:endParaRPr lang="en-US" sz="1300" dirty="0"/>
+            <a:endParaRPr lang="en-US" sz="1350" dirty="0"/>
           </a:p>
         </p:txBody>
       </p:sp>
@@ -2478,6 +2506,13 @@
           </a:prstGeom>
           <a:noFill/>
           <a:ln/>
+          <a:effectLst>
+            <a:outerShdw sx="100000" sy="100000" kx="0" ky="0" algn="bl" rotWithShape="0" blurRad="76200" dist="25400" dir="5400000">
+              <a:srgbClr val="5A1A00">
+                <a:alpha val="60000"/>
+              </a:srgbClr>
+            </a:outerShdw>
+          </a:effectLst>
         </p:spPr>
         <p:txBody>
           <a:bodyPr wrap="square" lIns="0" tIns="0" rIns="0" bIns="0" rtlCol="0" anchor="ctr"/>
@@ -2487,9 +2522,9 @@
               <a:buNone/>
             </a:pPr>
             <a:r>
-              <a:rPr lang="en-US" sz="1300" dirty="0">
-                <a:solidFill>
-                  <a:srgbClr val="E8D9C6"/>
+              <a:rPr lang="en-US" sz="1350" b="1" dirty="0">
+                <a:solidFill>
+                  <a:srgbClr val="FFF6E8"/>
                 </a:solidFill>
                 <a:latin typeface="Microsoft YaHei" pitchFamily="34" charset="0"/>
                 <a:ea typeface="Microsoft YaHei" pitchFamily="34" charset="-122"/>
@@ -2497,7 +2532,7 @@
               </a:rPr>
               <a:t>《上瘾自律》两天AI创造营</a:t>
             </a:r>
-            <a:endParaRPr lang="en-US" sz="1300" dirty="0"/>
+            <a:endParaRPr lang="en-US" sz="1350" dirty="0"/>
           </a:p>
         </p:txBody>
       </p:sp>
@@ -2555,7 +2590,7 @@
             <a:avLst/>
           </a:prstGeom>
           <a:solidFill>
-            <a:srgbClr val="FF7A1A"/>
+            <a:srgbClr val="FF8A1E"/>
           </a:solidFill>
           <a:ln/>
         </p:spPr>
@@ -2587,7 +2622,7 @@
             <a:r>
               <a:rPr lang="en-US" sz="1200" b="1" spc="200" kern="0" dirty="0">
                 <a:solidFill>
-                  <a:srgbClr val="7A736C"/>
+                  <a:srgbClr val="9A7550"/>
                 </a:solidFill>
                 <a:latin typeface="Microsoft YaHei" pitchFamily="34" charset="0"/>
                 <a:ea typeface="Microsoft YaHei" pitchFamily="34" charset="-122"/>
@@ -2665,7 +2700,7 @@
             <a:r>
               <a:rPr lang="en-US" sz="1600" dirty="0">
                 <a:solidFill>
-                  <a:srgbClr val="7A736C"/>
+                  <a:srgbClr val="9A7550"/>
                 </a:solidFill>
                 <a:latin typeface="Microsoft YaHei" pitchFamily="34" charset="0"/>
                 <a:ea typeface="Microsoft YaHei" pitchFamily="34" charset="-122"/>
@@ -2704,7 +2739,7 @@
             <a:r>
               <a:rPr lang="en-US" sz="1100" dirty="0">
                 <a:solidFill>
-                  <a:srgbClr val="7A736C"/>
+                  <a:srgbClr val="9A7550"/>
                 </a:solidFill>
                 <a:latin typeface="Microsoft YaHei" pitchFamily="34" charset="0"/>
                 <a:ea typeface="Microsoft YaHei" pitchFamily="34" charset="-122"/>
@@ -2731,7 +2766,7 @@
           </p:nvPr>
         </p:nvGraphicFramePr>
         <p:xfrm>
-          <a:off x="548640" y="2468880"/>
+          <a:off x="548640" y="2286000"/>
           <a:ext cx="11064240" cy="914400"/>
         </p:xfrm>
         <a:graphic>
@@ -2744,7 +2779,7 @@
                 <a:gridCol w="2743200"/>
                 <a:gridCol w="3017520"/>
               </a:tblGrid>
-              <a:tr h="1371600">
+              <a:tr h="914400">
                 <a:tc>
                   <a:txBody>
                     <a:bodyPr/>
@@ -2754,9 +2789,9 @@
                         <a:buNone/>
                       </a:pPr>
                       <a:r>
-                        <a:rPr lang="en-US" sz="1450" b="1" dirty="0">
+                        <a:rPr lang="en-US" sz="1400" b="1" dirty="0">
                           <a:solidFill>
-                            <a:srgbClr val="E63329"/>
+                            <a:srgbClr val="F03A21"/>
                           </a:solidFill>
                           <a:latin typeface="Microsoft YaHei" pitchFamily="34" charset="0"/>
                           <a:ea typeface="Microsoft YaHei" pitchFamily="34" charset="-122"/>
@@ -2764,7 +2799,7 @@
                         </a:rPr>
                         <a:t>0 分</a:t>
                       </a:r>
-                      <a:endParaRPr lang="en-US" sz="1450" dirty="0">
+                      <a:endParaRPr lang="en-US" sz="1400" dirty="0">
                         <a:latin typeface="Microsoft YaHei" charset="0"/>
                         <a:ea typeface="Microsoft YaHei" charset="0"/>
                         <a:cs typeface="Microsoft YaHei" charset="0"/>
@@ -2774,7 +2809,7 @@
                   <a:tcPr marL="91440" marR="91440" marT="45720" marB="45720" anchor="ctr">
                     <a:lnL w="12700" cap="flat" cmpd="sng" algn="ctr">
                       <a:solidFill>
-                        <a:srgbClr val="E2D9CC"/>
+                        <a:srgbClr val="F0DCBC"/>
                       </a:solidFill>
                       <a:prstDash val="solid"/>
                       <a:round/>
@@ -2783,7 +2818,7 @@
                     </a:lnL>
                     <a:lnR w="12700" cap="flat" cmpd="sng" algn="ctr">
                       <a:solidFill>
-                        <a:srgbClr val="E2D9CC"/>
+                        <a:srgbClr val="F0DCBC"/>
                       </a:solidFill>
                       <a:prstDash val="solid"/>
                       <a:round/>
@@ -2792,7 +2827,7 @@
                     </a:lnR>
                     <a:lnT w="12700" cap="flat" cmpd="sng" algn="ctr">
                       <a:solidFill>
-                        <a:srgbClr val="E2D9CC"/>
+                        <a:srgbClr val="F0DCBC"/>
                       </a:solidFill>
                       <a:prstDash val="solid"/>
                       <a:round/>
@@ -2801,7 +2836,7 @@
                     </a:lnT>
                     <a:lnB w="12700" cap="flat" cmpd="sng" algn="ctr">
                       <a:solidFill>
-                        <a:srgbClr val="E2D9CC"/>
+                        <a:srgbClr val="F0DCBC"/>
                       </a:solidFill>
                       <a:prstDash val="solid"/>
                       <a:round/>
@@ -2822,9 +2857,9 @@
                         <a:buNone/>
                       </a:pPr>
                       <a:r>
-                        <a:rPr lang="en-US" sz="1450" b="1" dirty="0">
+                        <a:rPr lang="en-US" sz="1400" b="1" dirty="0">
                           <a:solidFill>
-                            <a:srgbClr val="3A332E"/>
+                            <a:srgbClr val="4A3B2C"/>
                           </a:solidFill>
                           <a:latin typeface="Microsoft YaHei" pitchFamily="34" charset="0"/>
                           <a:ea typeface="Microsoft YaHei" pitchFamily="34" charset="-122"/>
@@ -2832,7 +2867,7 @@
                         </a:rPr>
                         <a:t>1 分</a:t>
                       </a:r>
-                      <a:endParaRPr lang="en-US" sz="1450" dirty="0">
+                      <a:endParaRPr lang="en-US" sz="1400" dirty="0">
                         <a:latin typeface="Microsoft YaHei" charset="0"/>
                         <a:ea typeface="Microsoft YaHei" charset="0"/>
                         <a:cs typeface="Microsoft YaHei" charset="0"/>
@@ -2842,7 +2877,7 @@
                   <a:tcPr marL="91440" marR="91440" marT="45720" marB="45720" anchor="ctr">
                     <a:lnL w="12700" cap="flat" cmpd="sng" algn="ctr">
                       <a:solidFill>
-                        <a:srgbClr val="E2D9CC"/>
+                        <a:srgbClr val="F0DCBC"/>
                       </a:solidFill>
                       <a:prstDash val="solid"/>
                       <a:round/>
@@ -2851,7 +2886,7 @@
                     </a:lnL>
                     <a:lnR w="12700" cap="flat" cmpd="sng" algn="ctr">
                       <a:solidFill>
-                        <a:srgbClr val="E2D9CC"/>
+                        <a:srgbClr val="F0DCBC"/>
                       </a:solidFill>
                       <a:prstDash val="solid"/>
                       <a:round/>
@@ -2860,7 +2895,7 @@
                     </a:lnR>
                     <a:lnT w="12700" cap="flat" cmpd="sng" algn="ctr">
                       <a:solidFill>
-                        <a:srgbClr val="E2D9CC"/>
+                        <a:srgbClr val="F0DCBC"/>
                       </a:solidFill>
                       <a:prstDash val="solid"/>
                       <a:round/>
@@ -2869,7 +2904,7 @@
                     </a:lnT>
                     <a:lnB w="12700" cap="flat" cmpd="sng" algn="ctr">
                       <a:solidFill>
-                        <a:srgbClr val="E2D9CC"/>
+                        <a:srgbClr val="F0DCBC"/>
                       </a:solidFill>
                       <a:prstDash val="solid"/>
                       <a:round/>
@@ -2890,9 +2925,9 @@
                         <a:buNone/>
                       </a:pPr>
                       <a:r>
-                        <a:rPr lang="en-US" sz="1450" b="1" dirty="0">
+                        <a:rPr lang="en-US" sz="1400" b="1" dirty="0">
                           <a:solidFill>
-                            <a:srgbClr val="3A332E"/>
+                            <a:srgbClr val="4A3B2C"/>
                           </a:solidFill>
                           <a:latin typeface="Microsoft YaHei" pitchFamily="34" charset="0"/>
                           <a:ea typeface="Microsoft YaHei" pitchFamily="34" charset="-122"/>
@@ -2900,7 +2935,7 @@
                         </a:rPr>
                         <a:t>2 分</a:t>
                       </a:r>
-                      <a:endParaRPr lang="en-US" sz="1450" dirty="0">
+                      <a:endParaRPr lang="en-US" sz="1400" dirty="0">
                         <a:latin typeface="Microsoft YaHei" charset="0"/>
                         <a:ea typeface="Microsoft YaHei" charset="0"/>
                         <a:cs typeface="Microsoft YaHei" charset="0"/>
@@ -2910,7 +2945,7 @@
                   <a:tcPr marL="91440" marR="91440" marT="45720" marB="45720" anchor="ctr">
                     <a:lnL w="12700" cap="flat" cmpd="sng" algn="ctr">
                       <a:solidFill>
-                        <a:srgbClr val="E2D9CC"/>
+                        <a:srgbClr val="F0DCBC"/>
                       </a:solidFill>
                       <a:prstDash val="solid"/>
                       <a:round/>
@@ -2919,7 +2954,7 @@
                     </a:lnL>
                     <a:lnR w="12700" cap="flat" cmpd="sng" algn="ctr">
                       <a:solidFill>
-                        <a:srgbClr val="E2D9CC"/>
+                        <a:srgbClr val="F0DCBC"/>
                       </a:solidFill>
                       <a:prstDash val="solid"/>
                       <a:round/>
@@ -2928,7 +2963,7 @@
                     </a:lnR>
                     <a:lnT w="12700" cap="flat" cmpd="sng" algn="ctr">
                       <a:solidFill>
-                        <a:srgbClr val="E2D9CC"/>
+                        <a:srgbClr val="F0DCBC"/>
                       </a:solidFill>
                       <a:prstDash val="solid"/>
                       <a:round/>
@@ -2937,7 +2972,7 @@
                     </a:lnT>
                     <a:lnB w="12700" cap="flat" cmpd="sng" algn="ctr">
                       <a:solidFill>
-                        <a:srgbClr val="E2D9CC"/>
+                        <a:srgbClr val="F0DCBC"/>
                       </a:solidFill>
                       <a:prstDash val="solid"/>
                       <a:round/>
@@ -2958,7 +2993,7 @@
                         <a:buNone/>
                       </a:pPr>
                       <a:r>
-                        <a:rPr lang="en-US" sz="1450" b="1" dirty="0">
+                        <a:rPr lang="en-US" sz="1400" b="1" dirty="0">
                           <a:solidFill>
                             <a:srgbClr val="1E7F42"/>
                           </a:solidFill>
@@ -2968,7 +3003,7 @@
                         </a:rPr>
                         <a:t>3 分</a:t>
                       </a:r>
-                      <a:endParaRPr lang="en-US" sz="1450" dirty="0">
+                      <a:endParaRPr lang="en-US" sz="1400" dirty="0">
                         <a:latin typeface="Microsoft YaHei" charset="0"/>
                         <a:ea typeface="Microsoft YaHei" charset="0"/>
                         <a:cs typeface="Microsoft YaHei" charset="0"/>
@@ -2978,7 +3013,7 @@
                   <a:tcPr marL="91440" marR="91440" marT="45720" marB="45720" anchor="ctr">
                     <a:lnL w="12700" cap="flat" cmpd="sng" algn="ctr">
                       <a:solidFill>
-                        <a:srgbClr val="E2D9CC"/>
+                        <a:srgbClr val="F0DCBC"/>
                       </a:solidFill>
                       <a:prstDash val="solid"/>
                       <a:round/>
@@ -2987,7 +3022,7 @@
                     </a:lnL>
                     <a:lnR w="12700" cap="flat" cmpd="sng" algn="ctr">
                       <a:solidFill>
-                        <a:srgbClr val="E2D9CC"/>
+                        <a:srgbClr val="F0DCBC"/>
                       </a:solidFill>
                       <a:prstDash val="solid"/>
                       <a:round/>
@@ -2996,7 +3031,7 @@
                     </a:lnR>
                     <a:lnT w="12700" cap="flat" cmpd="sng" algn="ctr">
                       <a:solidFill>
-                        <a:srgbClr val="E2D9CC"/>
+                        <a:srgbClr val="F0DCBC"/>
                       </a:solidFill>
                       <a:prstDash val="solid"/>
                       <a:round/>
@@ -3005,7 +3040,7 @@
                     </a:lnT>
                     <a:lnB w="12700" cap="flat" cmpd="sng" algn="ctr">
                       <a:solidFill>
-                        <a:srgbClr val="E2D9CC"/>
+                        <a:srgbClr val="F0DCBC"/>
                       </a:solidFill>
                       <a:prstDash val="solid"/>
                       <a:round/>
@@ -3018,7 +3053,7 @@
                   </a:tcPr>
                 </a:tc>
               </a:tr>
-              <a:tr h="1371600">
+              <a:tr h="914400">
                 <a:tc>
                   <a:txBody>
                     <a:bodyPr/>
@@ -3028,9 +3063,9 @@
                         <a:buNone/>
                       </a:pPr>
                       <a:r>
-                        <a:rPr lang="en-US" sz="1450" dirty="0">
+                        <a:rPr lang="en-US" sz="1400" dirty="0">
                           <a:solidFill>
-                            <a:srgbClr val="3A332E"/>
+                            <a:srgbClr val="4A3B2C"/>
                           </a:solidFill>
                           <a:latin typeface="Microsoft YaHei" pitchFamily="34" charset="0"/>
                           <a:ea typeface="Microsoft YaHei" pitchFamily="34" charset="-122"/>
@@ -3038,7 +3073,7 @@
                         </a:rPr>
                         <a:t>写死了，改不了</a:t>
                       </a:r>
-                      <a:endParaRPr lang="en-US" sz="1450" dirty="0">
+                      <a:endParaRPr lang="en-US" sz="1400" dirty="0">
                         <a:latin typeface="Microsoft YaHei" charset="0"/>
                         <a:ea typeface="Microsoft YaHei" charset="0"/>
                         <a:cs typeface="Microsoft YaHei" charset="0"/>
@@ -3048,7 +3083,7 @@
                   <a:tcPr marL="91440" marR="91440" marT="45720" marB="45720" anchor="ctr">
                     <a:lnL w="12700" cap="flat" cmpd="sng" algn="ctr">
                       <a:solidFill>
-                        <a:srgbClr val="E2D9CC"/>
+                        <a:srgbClr val="F0DCBC"/>
                       </a:solidFill>
                       <a:prstDash val="solid"/>
                       <a:round/>
@@ -3057,7 +3092,7 @@
                     </a:lnL>
                     <a:lnR w="12700" cap="flat" cmpd="sng" algn="ctr">
                       <a:solidFill>
-                        <a:srgbClr val="E2D9CC"/>
+                        <a:srgbClr val="F0DCBC"/>
                       </a:solidFill>
                       <a:prstDash val="solid"/>
                       <a:round/>
@@ -3066,7 +3101,7 @@
                     </a:lnR>
                     <a:lnT w="12700" cap="flat" cmpd="sng" algn="ctr">
                       <a:solidFill>
-                        <a:srgbClr val="E2D9CC"/>
+                        <a:srgbClr val="F0DCBC"/>
                       </a:solidFill>
                       <a:prstDash val="solid"/>
                       <a:round/>
@@ -3075,7 +3110,7 @@
                     </a:lnT>
                     <a:lnB w="12700" cap="flat" cmpd="sng" algn="ctr">
                       <a:solidFill>
-                        <a:srgbClr val="E2D9CC"/>
+                        <a:srgbClr val="F0DCBC"/>
                       </a:solidFill>
                       <a:prstDash val="solid"/>
                       <a:round/>
@@ -3096,9 +3131,9 @@
                         <a:buNone/>
                       </a:pPr>
                       <a:r>
-                        <a:rPr lang="en-US" sz="1450" dirty="0">
+                        <a:rPr lang="en-US" sz="1400" dirty="0">
                           <a:solidFill>
-                            <a:srgbClr val="3A332E"/>
+                            <a:srgbClr val="4A3B2C"/>
                           </a:solidFill>
                           <a:latin typeface="Microsoft YaHei" pitchFamily="34" charset="0"/>
                           <a:ea typeface="Microsoft YaHei" pitchFamily="34" charset="-122"/>
@@ -3106,7 +3141,7 @@
                         </a:rPr>
                         <a:t>能改，但藏得很深／要好几步</a:t>
                       </a:r>
-                      <a:endParaRPr lang="en-US" sz="1450" dirty="0">
+                      <a:endParaRPr lang="en-US" sz="1400" dirty="0">
                         <a:latin typeface="Microsoft YaHei" charset="0"/>
                         <a:ea typeface="Microsoft YaHei" charset="0"/>
                         <a:cs typeface="Microsoft YaHei" charset="0"/>
@@ -3116,7 +3151,7 @@
                   <a:tcPr marL="91440" marR="91440" marT="45720" marB="45720" anchor="ctr">
                     <a:lnL w="12700" cap="flat" cmpd="sng" algn="ctr">
                       <a:solidFill>
-                        <a:srgbClr val="E2D9CC"/>
+                        <a:srgbClr val="F0DCBC"/>
                       </a:solidFill>
                       <a:prstDash val="solid"/>
                       <a:round/>
@@ -3125,7 +3160,7 @@
                     </a:lnL>
                     <a:lnR w="12700" cap="flat" cmpd="sng" algn="ctr">
                       <a:solidFill>
-                        <a:srgbClr val="E2D9CC"/>
+                        <a:srgbClr val="F0DCBC"/>
                       </a:solidFill>
                       <a:prstDash val="solid"/>
                       <a:round/>
@@ -3134,7 +3169,7 @@
                     </a:lnR>
                     <a:lnT w="12700" cap="flat" cmpd="sng" algn="ctr">
                       <a:solidFill>
-                        <a:srgbClr val="E2D9CC"/>
+                        <a:srgbClr val="F0DCBC"/>
                       </a:solidFill>
                       <a:prstDash val="solid"/>
                       <a:round/>
@@ -3143,7 +3178,7 @@
                     </a:lnT>
                     <a:lnB w="12700" cap="flat" cmpd="sng" algn="ctr">
                       <a:solidFill>
-                        <a:srgbClr val="E2D9CC"/>
+                        <a:srgbClr val="F0DCBC"/>
                       </a:solidFill>
                       <a:prstDash val="solid"/>
                       <a:round/>
@@ -3164,9 +3199,9 @@
                         <a:buNone/>
                       </a:pPr>
                       <a:r>
-                        <a:rPr lang="en-US" sz="1450" dirty="0">
+                        <a:rPr lang="en-US" sz="1400" dirty="0">
                           <a:solidFill>
-                            <a:srgbClr val="3A332E"/>
+                            <a:srgbClr val="4A3B2C"/>
                           </a:solidFill>
                           <a:latin typeface="Microsoft YaHei" pitchFamily="34" charset="0"/>
                           <a:ea typeface="Microsoft YaHei" pitchFamily="34" charset="-122"/>
@@ -3174,7 +3209,7 @@
                         </a:rPr>
                         <a:t>能改，主界面找得到</a:t>
                       </a:r>
-                      <a:endParaRPr lang="en-US" sz="1450" dirty="0">
+                      <a:endParaRPr lang="en-US" sz="1400" dirty="0">
                         <a:latin typeface="Microsoft YaHei" charset="0"/>
                         <a:ea typeface="Microsoft YaHei" charset="0"/>
                         <a:cs typeface="Microsoft YaHei" charset="0"/>
@@ -3184,7 +3219,7 @@
                   <a:tcPr marL="91440" marR="91440" marT="45720" marB="45720" anchor="ctr">
                     <a:lnL w="12700" cap="flat" cmpd="sng" algn="ctr">
                       <a:solidFill>
-                        <a:srgbClr val="E2D9CC"/>
+                        <a:srgbClr val="F0DCBC"/>
                       </a:solidFill>
                       <a:prstDash val="solid"/>
                       <a:round/>
@@ -3193,7 +3228,7 @@
                     </a:lnL>
                     <a:lnR w="12700" cap="flat" cmpd="sng" algn="ctr">
                       <a:solidFill>
-                        <a:srgbClr val="E2D9CC"/>
+                        <a:srgbClr val="F0DCBC"/>
                       </a:solidFill>
                       <a:prstDash val="solid"/>
                       <a:round/>
@@ -3202,7 +3237,7 @@
                     </a:lnR>
                     <a:lnT w="12700" cap="flat" cmpd="sng" algn="ctr">
                       <a:solidFill>
-                        <a:srgbClr val="E2D9CC"/>
+                        <a:srgbClr val="F0DCBC"/>
                       </a:solidFill>
                       <a:prstDash val="solid"/>
                       <a:round/>
@@ -3211,7 +3246,7 @@
                     </a:lnT>
                     <a:lnB w="12700" cap="flat" cmpd="sng" algn="ctr">
                       <a:solidFill>
-                        <a:srgbClr val="E2D9CC"/>
+                        <a:srgbClr val="F0DCBC"/>
                       </a:solidFill>
                       <a:prstDash val="solid"/>
                       <a:round/>
@@ -3232,9 +3267,9 @@
                         <a:buNone/>
                       </a:pPr>
                       <a:r>
-                        <a:rPr lang="en-US" sz="1450" dirty="0">
+                        <a:rPr lang="en-US" sz="1400" dirty="0">
                           <a:solidFill>
-                            <a:srgbClr val="3A332E"/>
+                            <a:srgbClr val="4A3B2C"/>
                           </a:solidFill>
                           <a:latin typeface="Microsoft YaHei" pitchFamily="34" charset="0"/>
                           <a:ea typeface="Microsoft YaHei" pitchFamily="34" charset="-122"/>
@@ -3242,7 +3277,7 @@
                         </a:rPr>
                         <a:t>首次使用就让用户自己设，随时能改，改小了也不影响功能</a:t>
                       </a:r>
-                      <a:endParaRPr lang="en-US" sz="1450" dirty="0">
+                      <a:endParaRPr lang="en-US" sz="1400" dirty="0">
                         <a:latin typeface="Microsoft YaHei" charset="0"/>
                         <a:ea typeface="Microsoft YaHei" charset="0"/>
                         <a:cs typeface="Microsoft YaHei" charset="0"/>
@@ -3252,7 +3287,7 @@
                   <a:tcPr marL="91440" marR="91440" marT="45720" marB="45720" anchor="ctr">
                     <a:lnL w="12700" cap="flat" cmpd="sng" algn="ctr">
                       <a:solidFill>
-                        <a:srgbClr val="E2D9CC"/>
+                        <a:srgbClr val="F0DCBC"/>
                       </a:solidFill>
                       <a:prstDash val="solid"/>
                       <a:round/>
@@ -3261,7 +3296,7 @@
                     </a:lnL>
                     <a:lnR w="12700" cap="flat" cmpd="sng" algn="ctr">
                       <a:solidFill>
-                        <a:srgbClr val="E2D9CC"/>
+                        <a:srgbClr val="F0DCBC"/>
                       </a:solidFill>
                       <a:prstDash val="solid"/>
                       <a:round/>
@@ -3270,7 +3305,7 @@
                     </a:lnR>
                     <a:lnT w="12700" cap="flat" cmpd="sng" algn="ctr">
                       <a:solidFill>
-                        <a:srgbClr val="E2D9CC"/>
+                        <a:srgbClr val="F0DCBC"/>
                       </a:solidFill>
                       <a:prstDash val="solid"/>
                       <a:round/>
@@ -3279,7 +3314,7 @@
                     </a:lnT>
                     <a:lnB w="12700" cap="flat" cmpd="sng" algn="ctr">
                       <a:solidFill>
-                        <a:srgbClr val="E2D9CC"/>
+                        <a:srgbClr val="F0DCBC"/>
                       </a:solidFill>
                       <a:prstDash val="solid"/>
                       <a:round/>
@@ -3304,7 +3339,7 @@
         </p:nvSpPr>
         <p:spPr>
           <a:xfrm>
-            <a:off x="548640" y="4572000"/>
+            <a:off x="548640" y="4709160"/>
             <a:ext cx="11064240" cy="822960"/>
           </a:xfrm>
           <a:prstGeom prst="roundRect">
@@ -3317,7 +3352,7 @@
           </a:solidFill>
           <a:ln w="19050">
             <a:solidFill>
-              <a:srgbClr val="FF7A1A"/>
+              <a:srgbClr val="FF8A1E"/>
             </a:solidFill>
             <a:prstDash val="solid"/>
           </a:ln>
@@ -3331,7 +3366,7 @@
         </p:nvSpPr>
         <p:spPr>
           <a:xfrm>
-            <a:off x="841248" y="4626864"/>
+            <a:off x="841248" y="4764024"/>
             <a:ext cx="10515600" cy="713232"/>
           </a:xfrm>
           <a:prstGeom prst="rect">
@@ -3373,7 +3408,7 @@
         </p:nvSpPr>
         <p:spPr>
           <a:xfrm>
-            <a:off x="566928" y="5577840"/>
+            <a:off x="566928" y="5669280"/>
             <a:ext cx="10515600" cy="731520"/>
           </a:xfrm>
           <a:prstGeom prst="rect">
@@ -3395,7 +3430,7 @@
             <a:r>
               <a:rPr lang="en-US" sz="1450" dirty="0">
                 <a:solidFill>
-                  <a:srgbClr val="7A736C"/>
+                  <a:srgbClr val="9A7550"/>
                 </a:solidFill>
                 <a:latin typeface="Microsoft YaHei" pitchFamily="34" charset="0"/>
                 <a:ea typeface="Microsoft YaHei" pitchFamily="34" charset="-122"/>
@@ -3461,7 +3496,7 @@
             <a:avLst/>
           </a:prstGeom>
           <a:solidFill>
-            <a:srgbClr val="FF7A1A"/>
+            <a:srgbClr val="FF8A1E"/>
           </a:solidFill>
           <a:ln/>
         </p:spPr>
@@ -3493,7 +3528,7 @@
             <a:r>
               <a:rPr lang="en-US" sz="1200" b="1" spc="200" kern="0" dirty="0">
                 <a:solidFill>
-                  <a:srgbClr val="7A736C"/>
+                  <a:srgbClr val="9A7550"/>
                 </a:solidFill>
                 <a:latin typeface="Microsoft YaHei" pitchFamily="34" charset="0"/>
                 <a:ea typeface="Microsoft YaHei" pitchFamily="34" charset="-122"/>
@@ -3571,7 +3606,7 @@
             <a:r>
               <a:rPr lang="en-US" sz="1100" dirty="0">
                 <a:solidFill>
-                  <a:srgbClr val="7A736C"/>
+                  <a:srgbClr val="9A7550"/>
                 </a:solidFill>
                 <a:latin typeface="Microsoft YaHei" pitchFamily="34" charset="0"/>
                 <a:ea typeface="Microsoft YaHei" pitchFamily="34" charset="-122"/>
@@ -3604,7 +3639,7 @@
           </a:solidFill>
           <a:ln w="19050">
             <a:solidFill>
-              <a:srgbClr val="E63329"/>
+              <a:srgbClr val="F03A21"/>
             </a:solidFill>
             <a:prstDash val="solid"/>
           </a:ln>
@@ -3637,7 +3672,7 @@
             <a:r>
               <a:rPr lang="en-US" sz="1300" b="1" spc="200" kern="0" dirty="0">
                 <a:solidFill>
-                  <a:srgbClr val="E63329"/>
+                  <a:srgbClr val="F03A21"/>
                 </a:solidFill>
                 <a:latin typeface="Microsoft YaHei" pitchFamily="34" charset="0"/>
                 <a:ea typeface="Microsoft YaHei" pitchFamily="34" charset="-122"/>
@@ -3725,7 +3760,7 @@
             <a:r>
               <a:rPr lang="en-US" sz="1150" dirty="0">
                 <a:solidFill>
-                  <a:srgbClr val="3A332E"/>
+                  <a:srgbClr val="4A3B2C"/>
                 </a:solidFill>
                 <a:latin typeface="Microsoft YaHei" pitchFamily="34" charset="0"/>
                 <a:ea typeface="Microsoft YaHei" pitchFamily="34" charset="-122"/>
@@ -3749,7 +3784,7 @@
             <a:r>
               <a:rPr lang="en-US" sz="1150" dirty="0">
                 <a:solidFill>
-                  <a:srgbClr val="3A332E"/>
+                  <a:srgbClr val="4A3B2C"/>
                 </a:solidFill>
                 <a:latin typeface="Microsoft YaHei" pitchFamily="34" charset="0"/>
                 <a:ea typeface="Microsoft YaHei" pitchFamily="34" charset="-122"/>
@@ -3773,7 +3808,7 @@
             <a:r>
               <a:rPr lang="en-US" sz="1150" dirty="0">
                 <a:solidFill>
-                  <a:srgbClr val="3A332E"/>
+                  <a:srgbClr val="4A3B2C"/>
                 </a:solidFill>
                 <a:latin typeface="Microsoft YaHei" pitchFamily="34" charset="0"/>
                 <a:ea typeface="Microsoft YaHei" pitchFamily="34" charset="-122"/>
@@ -3797,7 +3832,7 @@
             <a:r>
               <a:rPr lang="en-US" sz="1150" dirty="0">
                 <a:solidFill>
-                  <a:srgbClr val="3A332E"/>
+                  <a:srgbClr val="4A3B2C"/>
                 </a:solidFill>
                 <a:latin typeface="Microsoft YaHei" pitchFamily="34" charset="0"/>
                 <a:ea typeface="Microsoft YaHei" pitchFamily="34" charset="-122"/>
@@ -3951,7 +3986,7 @@
             <a:r>
               <a:rPr lang="en-US" sz="1150" dirty="0">
                 <a:solidFill>
-                  <a:srgbClr val="3A332E"/>
+                  <a:srgbClr val="4A3B2C"/>
                 </a:solidFill>
                 <a:latin typeface="Microsoft YaHei" pitchFamily="34" charset="0"/>
                 <a:ea typeface="Microsoft YaHei" pitchFamily="34" charset="-122"/>
@@ -3975,7 +4010,7 @@
             <a:r>
               <a:rPr lang="en-US" sz="1150" dirty="0">
                 <a:solidFill>
-                  <a:srgbClr val="3A332E"/>
+                  <a:srgbClr val="4A3B2C"/>
                 </a:solidFill>
                 <a:latin typeface="Microsoft YaHei" pitchFamily="34" charset="0"/>
                 <a:ea typeface="Microsoft YaHei" pitchFamily="34" charset="-122"/>
@@ -3999,7 +4034,7 @@
             <a:r>
               <a:rPr lang="en-US" sz="1150" dirty="0">
                 <a:solidFill>
-                  <a:srgbClr val="3A332E"/>
+                  <a:srgbClr val="4A3B2C"/>
                 </a:solidFill>
                 <a:latin typeface="Microsoft YaHei" pitchFamily="34" charset="0"/>
                 <a:ea typeface="Microsoft YaHei" pitchFamily="34" charset="-122"/>
@@ -4023,7 +4058,7 @@
             <a:r>
               <a:rPr lang="en-US" sz="1150" dirty="0">
                 <a:solidFill>
-                  <a:srgbClr val="3A332E"/>
+                  <a:srgbClr val="4A3B2C"/>
                 </a:solidFill>
                 <a:latin typeface="Microsoft YaHei" pitchFamily="34" charset="0"/>
                 <a:ea typeface="Microsoft YaHei" pitchFamily="34" charset="-122"/>
@@ -4056,7 +4091,7 @@
           </a:solidFill>
           <a:ln w="19050">
             <a:solidFill>
-              <a:srgbClr val="E63329"/>
+              <a:srgbClr val="F03A21"/>
             </a:solidFill>
             <a:prstDash val="solid"/>
           </a:ln>
@@ -4158,7 +4193,7 @@
             <a:avLst/>
           </a:prstGeom>
           <a:solidFill>
-            <a:srgbClr val="FF7A1A"/>
+            <a:srgbClr val="FF8A1E"/>
           </a:solidFill>
           <a:ln/>
         </p:spPr>
@@ -4190,7 +4225,7 @@
             <a:r>
               <a:rPr lang="en-US" sz="1200" b="1" spc="200" kern="0" dirty="0">
                 <a:solidFill>
-                  <a:srgbClr val="7A736C"/>
+                  <a:srgbClr val="9A7550"/>
                 </a:solidFill>
                 <a:latin typeface="Microsoft YaHei" pitchFamily="34" charset="0"/>
                 <a:ea typeface="Microsoft YaHei" pitchFamily="34" charset="-122"/>
@@ -4268,7 +4303,7 @@
             <a:r>
               <a:rPr lang="en-US" sz="1600" dirty="0">
                 <a:solidFill>
-                  <a:srgbClr val="7A736C"/>
+                  <a:srgbClr val="9A7550"/>
                 </a:solidFill>
                 <a:latin typeface="Microsoft YaHei" pitchFamily="34" charset="0"/>
                 <a:ea typeface="Microsoft YaHei" pitchFamily="34" charset="-122"/>
@@ -4307,7 +4342,7 @@
             <a:r>
               <a:rPr lang="en-US" sz="1100" dirty="0">
                 <a:solidFill>
-                  <a:srgbClr val="7A736C"/>
+                  <a:srgbClr val="9A7550"/>
                 </a:solidFill>
                 <a:latin typeface="Microsoft YaHei" pitchFamily="34" charset="0"/>
                 <a:ea typeface="Microsoft YaHei" pitchFamily="34" charset="-122"/>
@@ -4334,7 +4369,7 @@
             <a:avLst/>
           </a:prstGeom>
           <a:solidFill>
-            <a:srgbClr val="E63329"/>
+            <a:srgbClr val="F03A21"/>
           </a:solidFill>
           <a:ln/>
         </p:spPr>
@@ -4428,7 +4463,7 @@
             <a:r>
               <a:rPr lang="en-US" sz="1450" dirty="0">
                 <a:solidFill>
-                  <a:srgbClr val="3A332E"/>
+                  <a:srgbClr val="4A3B2C"/>
                 </a:solidFill>
                 <a:latin typeface="Microsoft YaHei" pitchFamily="34" charset="0"/>
                 <a:ea typeface="Microsoft YaHei" pitchFamily="34" charset="-122"/>
@@ -4455,7 +4490,7 @@
             <a:avLst/>
           </a:prstGeom>
           <a:solidFill>
-            <a:srgbClr val="E63329"/>
+            <a:srgbClr val="F03A21"/>
           </a:solidFill>
           <a:ln/>
         </p:spPr>
@@ -4549,7 +4584,7 @@
             <a:r>
               <a:rPr lang="en-US" sz="1450" dirty="0">
                 <a:solidFill>
-                  <a:srgbClr val="3A332E"/>
+                  <a:srgbClr val="4A3B2C"/>
                 </a:solidFill>
                 <a:latin typeface="Microsoft YaHei" pitchFamily="34" charset="0"/>
                 <a:ea typeface="Microsoft YaHei" pitchFamily="34" charset="-122"/>
@@ -4670,7 +4705,7 @@
             <a:r>
               <a:rPr lang="en-US" sz="1450" dirty="0">
                 <a:solidFill>
-                  <a:srgbClr val="3A332E"/>
+                  <a:srgbClr val="4A3B2C"/>
                 </a:solidFill>
                 <a:latin typeface="Microsoft YaHei" pitchFamily="34" charset="0"/>
                 <a:ea typeface="Microsoft YaHei" pitchFamily="34" charset="-122"/>
@@ -4703,7 +4738,7 @@
           </a:solidFill>
           <a:ln w="19050">
             <a:solidFill>
-              <a:srgbClr val="E63329"/>
+              <a:srgbClr val="F03A21"/>
             </a:solidFill>
             <a:prstDash val="solid"/>
           </a:ln>
@@ -4805,7 +4840,7 @@
             <a:avLst/>
           </a:prstGeom>
           <a:solidFill>
-            <a:srgbClr val="FFC93C"/>
+            <a:srgbClr val="FFD24A"/>
           </a:solidFill>
           <a:ln/>
         </p:spPr>
@@ -4837,7 +4872,7 @@
             <a:r>
               <a:rPr lang="en-US" sz="1200" b="1" spc="200" kern="0" dirty="0">
                 <a:solidFill>
-                  <a:srgbClr val="F2E4D2"/>
+                  <a:srgbClr val="FFF0D4"/>
                 </a:solidFill>
                 <a:latin typeface="Microsoft YaHei" pitchFamily="34" charset="0"/>
                 <a:ea typeface="Microsoft YaHei" pitchFamily="34" charset="-122"/>
@@ -4865,6 +4900,13 @@
           </a:prstGeom>
           <a:noFill/>
           <a:ln/>
+          <a:effectLst>
+            <a:outerShdw sx="100000" sy="100000" kx="0" ky="0" algn="bl" rotWithShape="0" blurRad="152400" dist="25400" dir="5400000">
+              <a:srgbClr val="5A1A00">
+                <a:alpha val="42000"/>
+              </a:srgbClr>
+            </a:outerShdw>
+          </a:effectLst>
         </p:spPr>
         <p:txBody>
           <a:bodyPr wrap="square" lIns="0" tIns="0" rIns="0" bIns="0" rtlCol="0" anchor="ctr"/>
@@ -4927,6 +4969,13 @@
           </a:prstGeom>
           <a:noFill/>
           <a:ln/>
+          <a:effectLst>
+            <a:outerShdw sx="100000" sy="100000" kx="0" ky="0" algn="bl" rotWithShape="0" blurRad="88900" dist="25400" dir="5400000">
+              <a:srgbClr val="5A1A00">
+                <a:alpha val="50000"/>
+              </a:srgbClr>
+            </a:outerShdw>
+          </a:effectLst>
         </p:spPr>
         <p:txBody>
           <a:bodyPr wrap="square" lIns="0" tIns="0" rIns="0" bIns="0" rtlCol="0" anchor="t"/>
@@ -4934,14 +4983,14 @@
           <a:p>
             <a:pPr indent="0" marL="0">
               <a:lnSpc>
-                <a:spcPts val="2500"/>
+                <a:spcPts val="2600"/>
               </a:lnSpc>
               <a:buNone/>
             </a:pPr>
             <a:r>
-              <a:rPr lang="en-US" sz="1600" dirty="0">
-                <a:solidFill>
-                  <a:srgbClr val="FFE3C9"/>
+              <a:rPr lang="en-US" sz="1650" dirty="0">
+                <a:solidFill>
+                  <a:srgbClr val="FFFFFF"/>
                 </a:solidFill>
                 <a:latin typeface="Microsoft YaHei" pitchFamily="34" charset="0"/>
                 <a:ea typeface="Microsoft YaHei" pitchFamily="34" charset="-122"/>
@@ -4949,7 +4998,7 @@
               </a:rPr>
               <a:t>都是第二天回来了。但一个是喜欢，一个是害怕。公司的后台分不出这两种人 —— 只有用的人自己分得出来。所以必须问。</a:t>
             </a:r>
-            <a:endParaRPr lang="en-US" sz="1600" dirty="0"/>
+            <a:endParaRPr lang="en-US" sz="1650" dirty="0"/>
           </a:p>
         </p:txBody>
       </p:sp>
@@ -5007,7 +5056,7 @@
             <a:avLst/>
           </a:prstGeom>
           <a:solidFill>
-            <a:srgbClr val="FF7A1A"/>
+            <a:srgbClr val="FF8A1E"/>
           </a:solidFill>
           <a:ln/>
         </p:spPr>
@@ -5039,7 +5088,7 @@
             <a:r>
               <a:rPr lang="en-US" sz="1200" b="1" spc="200" kern="0" dirty="0">
                 <a:solidFill>
-                  <a:srgbClr val="7A736C"/>
+                  <a:srgbClr val="9A7550"/>
                 </a:solidFill>
                 <a:latin typeface="Microsoft YaHei" pitchFamily="34" charset="0"/>
                 <a:ea typeface="Microsoft YaHei" pitchFamily="34" charset="-122"/>
@@ -5117,7 +5166,7 @@
             <a:r>
               <a:rPr lang="en-US" sz="1100" dirty="0">
                 <a:solidFill>
-                  <a:srgbClr val="7A736C"/>
+                  <a:srgbClr val="9A7550"/>
                 </a:solidFill>
                 <a:latin typeface="Microsoft YaHei" pitchFamily="34" charset="0"/>
                 <a:ea typeface="Microsoft YaHei" pitchFamily="34" charset="-122"/>
@@ -5150,14 +5199,14 @@
           </a:solidFill>
           <a:ln w="12700">
             <a:solidFill>
-              <a:srgbClr val="E2D9CC"/>
+              <a:srgbClr val="F0DCBC"/>
             </a:solidFill>
             <a:prstDash val="solid"/>
           </a:ln>
           <a:effectLst>
-            <a:outerShdw sx="100000" sy="100000" kx="0" ky="0" algn="bl" rotWithShape="0" blurRad="127000" dist="25400" dir="5400000">
-              <a:srgbClr val="9A8C7A">
-                <a:alpha val="10000"/>
+            <a:outerShdw sx="100000" sy="100000" kx="0" ky="0" algn="bl" rotWithShape="0" blurRad="152400" dist="25400" dir="5400000">
+              <a:srgbClr val="C99A5E">
+                <a:alpha val="14000"/>
               </a:srgbClr>
             </a:outerShdw>
           </a:effectLst>
@@ -5274,7 +5323,7 @@
             <a:r>
               <a:rPr lang="en-US" sz="1450" dirty="0">
                 <a:solidFill>
-                  <a:srgbClr val="3A332E"/>
+                  <a:srgbClr val="4A3B2C"/>
                 </a:solidFill>
                 <a:latin typeface="Microsoft YaHei" pitchFamily="34" charset="0"/>
                 <a:ea typeface="Microsoft YaHei" pitchFamily="34" charset="-122"/>
@@ -5294,7 +5343,7 @@
             <a:r>
               <a:rPr lang="en-US" sz="1450" dirty="0">
                 <a:solidFill>
-                  <a:srgbClr val="3A332E"/>
+                  <a:srgbClr val="4A3B2C"/>
                 </a:solidFill>
                 <a:latin typeface="Microsoft YaHei" pitchFamily="34" charset="0"/>
                 <a:ea typeface="Microsoft YaHei" pitchFamily="34" charset="-122"/>
@@ -5327,14 +5376,14 @@
           </a:solidFill>
           <a:ln w="12700">
             <a:solidFill>
-              <a:srgbClr val="E2D9CC"/>
+              <a:srgbClr val="F0DCBC"/>
             </a:solidFill>
             <a:prstDash val="solid"/>
           </a:ln>
           <a:effectLst>
-            <a:outerShdw sx="100000" sy="100000" kx="0" ky="0" algn="bl" rotWithShape="0" blurRad="127000" dist="25400" dir="5400000">
-              <a:srgbClr val="9A8C7A">
-                <a:alpha val="10000"/>
+            <a:outerShdw sx="100000" sy="100000" kx="0" ky="0" algn="bl" rotWithShape="0" blurRad="152400" dist="25400" dir="5400000">
+              <a:srgbClr val="C99A5E">
+                <a:alpha val="14000"/>
               </a:srgbClr>
             </a:outerShdw>
           </a:effectLst>
@@ -5451,7 +5500,7 @@
             <a:r>
               <a:rPr lang="en-US" sz="1450" dirty="0">
                 <a:solidFill>
-                  <a:srgbClr val="3A332E"/>
+                  <a:srgbClr val="4A3B2C"/>
                 </a:solidFill>
                 <a:latin typeface="Microsoft YaHei" pitchFamily="34" charset="0"/>
                 <a:ea typeface="Microsoft YaHei" pitchFamily="34" charset="-122"/>
@@ -5471,7 +5520,7 @@
             <a:r>
               <a:rPr lang="en-US" sz="1450" dirty="0">
                 <a:solidFill>
-                  <a:srgbClr val="3A332E"/>
+                  <a:srgbClr val="4A3B2C"/>
                 </a:solidFill>
                 <a:latin typeface="Microsoft YaHei" pitchFamily="34" charset="0"/>
                 <a:ea typeface="Microsoft YaHei" pitchFamily="34" charset="-122"/>
@@ -5504,14 +5553,14 @@
           </a:solidFill>
           <a:ln w="12700">
             <a:solidFill>
-              <a:srgbClr val="E2D9CC"/>
+              <a:srgbClr val="F0DCBC"/>
             </a:solidFill>
             <a:prstDash val="solid"/>
           </a:ln>
           <a:effectLst>
-            <a:outerShdw sx="100000" sy="100000" kx="0" ky="0" algn="bl" rotWithShape="0" blurRad="127000" dist="25400" dir="5400000">
-              <a:srgbClr val="9A8C7A">
-                <a:alpha val="10000"/>
+            <a:outerShdw sx="100000" sy="100000" kx="0" ky="0" algn="bl" rotWithShape="0" blurRad="152400" dist="25400" dir="5400000">
+              <a:srgbClr val="C99A5E">
+                <a:alpha val="14000"/>
               </a:srgbClr>
             </a:outerShdw>
           </a:effectLst>
@@ -5544,7 +5593,7 @@
             <a:r>
               <a:rPr lang="en-US" sz="1300" b="1" spc="100" kern="0" dirty="0">
                 <a:solidFill>
-                  <a:srgbClr val="FF7A1A"/>
+                  <a:srgbClr val="FF8A1E"/>
                 </a:solidFill>
                 <a:latin typeface="Microsoft YaHei" pitchFamily="34" charset="0"/>
                 <a:ea typeface="Microsoft YaHei" pitchFamily="34" charset="-122"/>
@@ -5628,7 +5677,7 @@
             <a:r>
               <a:rPr lang="en-US" sz="1450" dirty="0">
                 <a:solidFill>
-                  <a:srgbClr val="3A332E"/>
+                  <a:srgbClr val="4A3B2C"/>
                 </a:solidFill>
                 <a:latin typeface="Microsoft YaHei" pitchFamily="34" charset="0"/>
                 <a:ea typeface="Microsoft YaHei" pitchFamily="34" charset="-122"/>
@@ -5648,7 +5697,7 @@
             <a:r>
               <a:rPr lang="en-US" sz="1450" dirty="0">
                 <a:solidFill>
-                  <a:srgbClr val="3A332E"/>
+                  <a:srgbClr val="4A3B2C"/>
                 </a:solidFill>
                 <a:latin typeface="Microsoft YaHei" pitchFamily="34" charset="0"/>
                 <a:ea typeface="Microsoft YaHei" pitchFamily="34" charset="-122"/>
@@ -5681,14 +5730,14 @@
           </a:solidFill>
           <a:ln w="12700">
             <a:solidFill>
-              <a:srgbClr val="E2D9CC"/>
+              <a:srgbClr val="F0DCBC"/>
             </a:solidFill>
             <a:prstDash val="solid"/>
           </a:ln>
           <a:effectLst>
-            <a:outerShdw sx="100000" sy="100000" kx="0" ky="0" algn="bl" rotWithShape="0" blurRad="127000" dist="25400" dir="5400000">
-              <a:srgbClr val="9A8C7A">
-                <a:alpha val="10000"/>
+            <a:outerShdw sx="100000" sy="100000" kx="0" ky="0" algn="bl" rotWithShape="0" blurRad="152400" dist="25400" dir="5400000">
+              <a:srgbClr val="C99A5E">
+                <a:alpha val="14000"/>
               </a:srgbClr>
             </a:outerShdw>
           </a:effectLst>
@@ -5721,7 +5770,7 @@
             <a:r>
               <a:rPr lang="en-US" sz="1300" b="1" spc="100" kern="0" dirty="0">
                 <a:solidFill>
-                  <a:srgbClr val="E63329"/>
+                  <a:srgbClr val="F03A21"/>
                 </a:solidFill>
                 <a:latin typeface="Microsoft YaHei" pitchFamily="34" charset="0"/>
                 <a:ea typeface="Microsoft YaHei" pitchFamily="34" charset="-122"/>
@@ -5805,7 +5854,7 @@
             <a:r>
               <a:rPr lang="en-US" sz="1450" dirty="0">
                 <a:solidFill>
-                  <a:srgbClr val="3A332E"/>
+                  <a:srgbClr val="4A3B2C"/>
                 </a:solidFill>
                 <a:latin typeface="Microsoft YaHei" pitchFamily="34" charset="0"/>
                 <a:ea typeface="Microsoft YaHei" pitchFamily="34" charset="-122"/>
@@ -5825,7 +5874,7 @@
             <a:r>
               <a:rPr lang="en-US" sz="1450" dirty="0">
                 <a:solidFill>
-                  <a:srgbClr val="3A332E"/>
+                  <a:srgbClr val="4A3B2C"/>
                 </a:solidFill>
                 <a:latin typeface="Microsoft YaHei" pitchFamily="34" charset="0"/>
                 <a:ea typeface="Microsoft YaHei" pitchFamily="34" charset="-122"/>
@@ -5858,7 +5907,7 @@
           </a:solidFill>
           <a:ln w="19050">
             <a:solidFill>
-              <a:srgbClr val="E63329"/>
+              <a:srgbClr val="F03A21"/>
             </a:solidFill>
             <a:prstDash val="solid"/>
           </a:ln>
@@ -5960,7 +6009,7 @@
             <a:avLst/>
           </a:prstGeom>
           <a:solidFill>
-            <a:srgbClr val="FF7A1A"/>
+            <a:srgbClr val="FF8A1E"/>
           </a:solidFill>
           <a:ln/>
         </p:spPr>
@@ -5992,7 +6041,7 @@
             <a:r>
               <a:rPr lang="en-US" sz="1200" b="1" spc="200" kern="0" dirty="0">
                 <a:solidFill>
-                  <a:srgbClr val="7A736C"/>
+                  <a:srgbClr val="9A7550"/>
                 </a:solidFill>
                 <a:latin typeface="Microsoft YaHei" pitchFamily="34" charset="0"/>
                 <a:ea typeface="Microsoft YaHei" pitchFamily="34" charset="-122"/>
@@ -6070,7 +6119,7 @@
             <a:r>
               <a:rPr lang="en-US" sz="1100" dirty="0">
                 <a:solidFill>
-                  <a:srgbClr val="7A736C"/>
+                  <a:srgbClr val="9A7550"/>
                 </a:solidFill>
                 <a:latin typeface="Microsoft YaHei" pitchFamily="34" charset="0"/>
                 <a:ea typeface="Microsoft YaHei" pitchFamily="34" charset="-122"/>
@@ -6103,7 +6152,7 @@
           </a:solidFill>
           <a:ln w="19050">
             <a:solidFill>
-              <a:srgbClr val="E63329"/>
+              <a:srgbClr val="F03A21"/>
             </a:solidFill>
             <a:prstDash val="solid"/>
           </a:ln>
@@ -6136,7 +6185,7 @@
             <a:r>
               <a:rPr lang="en-US" sz="1300" b="1" spc="200" kern="0" dirty="0">
                 <a:solidFill>
-                  <a:srgbClr val="E63329"/>
+                  <a:srgbClr val="F03A21"/>
                 </a:solidFill>
                 <a:latin typeface="Microsoft YaHei" pitchFamily="34" charset="0"/>
                 <a:ea typeface="Microsoft YaHei" pitchFamily="34" charset="-122"/>
@@ -6224,7 +6273,7 @@
             <a:r>
               <a:rPr lang="en-US" sz="1150" dirty="0">
                 <a:solidFill>
-                  <a:srgbClr val="3A332E"/>
+                  <a:srgbClr val="4A3B2C"/>
                 </a:solidFill>
                 <a:latin typeface="Microsoft YaHei" pitchFamily="34" charset="0"/>
                 <a:ea typeface="Microsoft YaHei" pitchFamily="34" charset="-122"/>
@@ -6248,7 +6297,7 @@
             <a:r>
               <a:rPr lang="en-US" sz="1150" dirty="0">
                 <a:solidFill>
-                  <a:srgbClr val="3A332E"/>
+                  <a:srgbClr val="4A3B2C"/>
                 </a:solidFill>
                 <a:latin typeface="Microsoft YaHei" pitchFamily="34" charset="0"/>
                 <a:ea typeface="Microsoft YaHei" pitchFamily="34" charset="-122"/>
@@ -6272,7 +6321,7 @@
             <a:r>
               <a:rPr lang="en-US" sz="1150" dirty="0">
                 <a:solidFill>
-                  <a:srgbClr val="3A332E"/>
+                  <a:srgbClr val="4A3B2C"/>
                 </a:solidFill>
                 <a:latin typeface="Microsoft YaHei" pitchFamily="34" charset="0"/>
                 <a:ea typeface="Microsoft YaHei" pitchFamily="34" charset="-122"/>
@@ -6296,7 +6345,7 @@
             <a:r>
               <a:rPr lang="en-US" sz="1150" dirty="0">
                 <a:solidFill>
-                  <a:srgbClr val="3A332E"/>
+                  <a:srgbClr val="4A3B2C"/>
                 </a:solidFill>
                 <a:latin typeface="Microsoft YaHei" pitchFamily="34" charset="0"/>
                 <a:ea typeface="Microsoft YaHei" pitchFamily="34" charset="-122"/>
@@ -6450,7 +6499,7 @@
             <a:r>
               <a:rPr lang="en-US" sz="1150" dirty="0">
                 <a:solidFill>
-                  <a:srgbClr val="3A332E"/>
+                  <a:srgbClr val="4A3B2C"/>
                 </a:solidFill>
                 <a:latin typeface="Microsoft YaHei" pitchFamily="34" charset="0"/>
                 <a:ea typeface="Microsoft YaHei" pitchFamily="34" charset="-122"/>
@@ -6474,7 +6523,7 @@
             <a:r>
               <a:rPr lang="en-US" sz="1150" dirty="0">
                 <a:solidFill>
-                  <a:srgbClr val="3A332E"/>
+                  <a:srgbClr val="4A3B2C"/>
                 </a:solidFill>
                 <a:latin typeface="Microsoft YaHei" pitchFamily="34" charset="0"/>
                 <a:ea typeface="Microsoft YaHei" pitchFamily="34" charset="-122"/>
@@ -6498,7 +6547,7 @@
             <a:r>
               <a:rPr lang="en-US" sz="1150" dirty="0">
                 <a:solidFill>
-                  <a:srgbClr val="3A332E"/>
+                  <a:srgbClr val="4A3B2C"/>
                 </a:solidFill>
                 <a:latin typeface="Microsoft YaHei" pitchFamily="34" charset="0"/>
                 <a:ea typeface="Microsoft YaHei" pitchFamily="34" charset="-122"/>
@@ -6522,7 +6571,7 @@
             <a:r>
               <a:rPr lang="en-US" sz="1150" dirty="0">
                 <a:solidFill>
-                  <a:srgbClr val="3A332E"/>
+                  <a:srgbClr val="4A3B2C"/>
                 </a:solidFill>
                 <a:latin typeface="Microsoft YaHei" pitchFamily="34" charset="0"/>
                 <a:ea typeface="Microsoft YaHei" pitchFamily="34" charset="-122"/>
@@ -6555,7 +6604,7 @@
           </a:solidFill>
           <a:ln w="19050">
             <a:solidFill>
-              <a:srgbClr val="E63329"/>
+              <a:srgbClr val="F03A21"/>
             </a:solidFill>
             <a:prstDash val="solid"/>
           </a:ln>
@@ -6657,7 +6706,7 @@
             <a:avLst/>
           </a:prstGeom>
           <a:solidFill>
-            <a:srgbClr val="FF7A1A"/>
+            <a:srgbClr val="FF8A1E"/>
           </a:solidFill>
           <a:ln/>
         </p:spPr>
@@ -6689,7 +6738,7 @@
             <a:r>
               <a:rPr lang="en-US" sz="1200" b="1" spc="200" kern="0" dirty="0">
                 <a:solidFill>
-                  <a:srgbClr val="7A736C"/>
+                  <a:srgbClr val="9A7550"/>
                 </a:solidFill>
                 <a:latin typeface="Microsoft YaHei" pitchFamily="34" charset="0"/>
                 <a:ea typeface="Microsoft YaHei" pitchFamily="34" charset="-122"/>
@@ -6767,7 +6816,7 @@
             <a:r>
               <a:rPr lang="en-US" sz="1100" dirty="0">
                 <a:solidFill>
-                  <a:srgbClr val="7A736C"/>
+                  <a:srgbClr val="9A7550"/>
                 </a:solidFill>
                 <a:latin typeface="Microsoft YaHei" pitchFamily="34" charset="0"/>
                 <a:ea typeface="Microsoft YaHei" pitchFamily="34" charset="-122"/>
@@ -6794,7 +6843,7 @@
             <a:avLst/>
           </a:prstGeom>
           <a:solidFill>
-            <a:srgbClr val="E63329"/>
+            <a:srgbClr val="F03A21"/>
           </a:solidFill>
           <a:ln/>
         </p:spPr>
@@ -6888,7 +6937,7 @@
             <a:r>
               <a:rPr lang="en-US" sz="1050" dirty="0">
                 <a:solidFill>
-                  <a:srgbClr val="3A332E"/>
+                  <a:srgbClr val="4A3B2C"/>
                 </a:solidFill>
                 <a:latin typeface="Microsoft YaHei" pitchFamily="34" charset="0"/>
                 <a:ea typeface="Microsoft YaHei" pitchFamily="34" charset="-122"/>
@@ -6915,7 +6964,7 @@
             <a:avLst/>
           </a:prstGeom>
           <a:solidFill>
-            <a:srgbClr val="E63329"/>
+            <a:srgbClr val="F03A21"/>
           </a:solidFill>
           <a:ln/>
         </p:spPr>
@@ -7009,7 +7058,7 @@
             <a:r>
               <a:rPr lang="en-US" sz="1050" dirty="0">
                 <a:solidFill>
-                  <a:srgbClr val="3A332E"/>
+                  <a:srgbClr val="4A3B2C"/>
                 </a:solidFill>
                 <a:latin typeface="Microsoft YaHei" pitchFamily="34" charset="0"/>
                 <a:ea typeface="Microsoft YaHei" pitchFamily="34" charset="-122"/>
@@ -7036,7 +7085,7 @@
             <a:avLst/>
           </a:prstGeom>
           <a:solidFill>
-            <a:srgbClr val="FF7A1A"/>
+            <a:srgbClr val="FF8A1E"/>
           </a:solidFill>
           <a:ln/>
         </p:spPr>
@@ -7130,7 +7179,7 @@
             <a:r>
               <a:rPr lang="en-US" sz="1050" dirty="0">
                 <a:solidFill>
-                  <a:srgbClr val="3A332E"/>
+                  <a:srgbClr val="4A3B2C"/>
                 </a:solidFill>
                 <a:latin typeface="Microsoft YaHei" pitchFamily="34" charset="0"/>
                 <a:ea typeface="Microsoft YaHei" pitchFamily="34" charset="-122"/>
@@ -7157,7 +7206,7 @@
             <a:avLst/>
           </a:prstGeom>
           <a:solidFill>
-            <a:srgbClr val="E63329"/>
+            <a:srgbClr val="F03A21"/>
           </a:solidFill>
           <a:ln/>
         </p:spPr>
@@ -7251,7 +7300,7 @@
             <a:r>
               <a:rPr lang="en-US" sz="1050" dirty="0">
                 <a:solidFill>
-                  <a:srgbClr val="3A332E"/>
+                  <a:srgbClr val="4A3B2C"/>
                 </a:solidFill>
                 <a:latin typeface="Microsoft YaHei" pitchFamily="34" charset="0"/>
                 <a:ea typeface="Microsoft YaHei" pitchFamily="34" charset="-122"/>
@@ -7278,7 +7327,7 @@
             <a:avLst/>
           </a:prstGeom>
           <a:solidFill>
-            <a:srgbClr val="E63329"/>
+            <a:srgbClr val="F03A21"/>
           </a:solidFill>
           <a:ln/>
         </p:spPr>
@@ -7372,7 +7421,7 @@
             <a:r>
               <a:rPr lang="en-US" sz="1050" dirty="0">
                 <a:solidFill>
-                  <a:srgbClr val="3A332E"/>
+                  <a:srgbClr val="4A3B2C"/>
                 </a:solidFill>
                 <a:latin typeface="Microsoft YaHei" pitchFamily="34" charset="0"/>
                 <a:ea typeface="Microsoft YaHei" pitchFamily="34" charset="-122"/>
@@ -7399,7 +7448,7 @@
             <a:avLst/>
           </a:prstGeom>
           <a:solidFill>
-            <a:srgbClr val="E63329"/>
+            <a:srgbClr val="F03A21"/>
           </a:solidFill>
           <a:ln/>
         </p:spPr>
@@ -7493,7 +7542,7 @@
             <a:r>
               <a:rPr lang="en-US" sz="1050" dirty="0">
                 <a:solidFill>
-                  <a:srgbClr val="3A332E"/>
+                  <a:srgbClr val="4A3B2C"/>
                 </a:solidFill>
                 <a:latin typeface="Microsoft YaHei" pitchFamily="34" charset="0"/>
                 <a:ea typeface="Microsoft YaHei" pitchFamily="34" charset="-122"/>
@@ -7559,7 +7608,7 @@
             <a:avLst/>
           </a:prstGeom>
           <a:solidFill>
-            <a:srgbClr val="FFC93C"/>
+            <a:srgbClr val="FFD24A"/>
           </a:solidFill>
           <a:ln/>
         </p:spPr>
@@ -7591,7 +7640,7 @@
             <a:r>
               <a:rPr lang="en-US" sz="1200" b="1" spc="200" kern="0" dirty="0">
                 <a:solidFill>
-                  <a:srgbClr val="F2E4D2"/>
+                  <a:srgbClr val="FFF0D4"/>
                 </a:solidFill>
                 <a:latin typeface="Microsoft YaHei" pitchFamily="34" charset="0"/>
                 <a:ea typeface="Microsoft YaHei" pitchFamily="34" charset="-122"/>
@@ -7619,6 +7668,13 @@
           </a:prstGeom>
           <a:noFill/>
           <a:ln/>
+          <a:effectLst>
+            <a:outerShdw sx="100000" sy="100000" kx="0" ky="0" algn="bl" rotWithShape="0" blurRad="152400" dist="25400" dir="5400000">
+              <a:srgbClr val="5A1A00">
+                <a:alpha val="42000"/>
+              </a:srgbClr>
+            </a:outerShdw>
+          </a:effectLst>
         </p:spPr>
         <p:txBody>
           <a:bodyPr wrap="square" lIns="0" tIns="0" rIns="0" bIns="0" rtlCol="0" anchor="ctr"/>
@@ -7701,6 +7757,13 @@
           </a:prstGeom>
           <a:noFill/>
           <a:ln/>
+          <a:effectLst>
+            <a:outerShdw sx="100000" sy="100000" kx="0" ky="0" algn="bl" rotWithShape="0" blurRad="88900" dist="25400" dir="5400000">
+              <a:srgbClr val="5A1A00">
+                <a:alpha val="50000"/>
+              </a:srgbClr>
+            </a:outerShdw>
+          </a:effectLst>
         </p:spPr>
         <p:txBody>
           <a:bodyPr wrap="square" lIns="0" tIns="0" rIns="0" bIns="0" rtlCol="0" anchor="t"/>
@@ -7708,14 +7771,14 @@
           <a:p>
             <a:pPr indent="0" marL="0">
               <a:lnSpc>
-                <a:spcPts val="2500"/>
+                <a:spcPts val="2600"/>
               </a:lnSpc>
               <a:buNone/>
             </a:pPr>
             <a:r>
-              <a:rPr lang="en-US" sz="1600" dirty="0">
-                <a:solidFill>
-                  <a:srgbClr val="FFE3C9"/>
+              <a:rPr lang="en-US" sz="1650" dirty="0">
+                <a:solidFill>
+                  <a:srgbClr val="FFFFFF"/>
                 </a:solidFill>
                 <a:latin typeface="Microsoft YaHei" pitchFamily="34" charset="0"/>
                 <a:ea typeface="Microsoft YaHei" pitchFamily="34" charset="-122"/>
@@ -7723,7 +7786,7 @@
               </a:rPr>
               <a:t>如果一个功能让用户更难离开 —— 它就站在这句话的反面，不管它有多好玩。</a:t>
             </a:r>
-            <a:endParaRPr lang="en-US" sz="1600" dirty="0"/>
+            <a:endParaRPr lang="en-US" sz="1650" dirty="0"/>
           </a:p>
         </p:txBody>
       </p:sp>
@@ -7781,7 +7844,7 @@
             <a:avLst/>
           </a:prstGeom>
           <a:solidFill>
-            <a:srgbClr val="FF7A1A"/>
+            <a:srgbClr val="FF8A1E"/>
           </a:solidFill>
           <a:ln/>
         </p:spPr>
@@ -7813,7 +7876,7 @@
             <a:r>
               <a:rPr lang="en-US" sz="1200" b="1" spc="200" kern="0" dirty="0">
                 <a:solidFill>
-                  <a:srgbClr val="7A736C"/>
+                  <a:srgbClr val="9A7550"/>
                 </a:solidFill>
                 <a:latin typeface="Microsoft YaHei" pitchFamily="34" charset="0"/>
                 <a:ea typeface="Microsoft YaHei" pitchFamily="34" charset="-122"/>
@@ -7891,7 +7954,7 @@
             <a:r>
               <a:rPr lang="en-US" sz="1100" dirty="0">
                 <a:solidFill>
-                  <a:srgbClr val="7A736C"/>
+                  <a:srgbClr val="9A7550"/>
                 </a:solidFill>
                 <a:latin typeface="Microsoft YaHei" pitchFamily="34" charset="0"/>
                 <a:ea typeface="Microsoft YaHei" pitchFamily="34" charset="-122"/>
@@ -7986,7 +8049,7 @@
           </a:solidFill>
           <a:ln w="19050">
             <a:solidFill>
-              <a:srgbClr val="FF7A1A"/>
+              <a:srgbClr val="FF8A1E"/>
             </a:solidFill>
             <a:prstDash val="solid"/>
           </a:ln>
@@ -8088,7 +8151,7 @@
             <a:avLst/>
           </a:prstGeom>
           <a:solidFill>
-            <a:srgbClr val="FFC93C"/>
+            <a:srgbClr val="FFD24A"/>
           </a:solidFill>
           <a:ln/>
         </p:spPr>
@@ -8120,7 +8183,7 @@
             <a:r>
               <a:rPr lang="en-US" sz="1200" b="1" spc="200" kern="0" dirty="0">
                 <a:solidFill>
-                  <a:srgbClr val="F2E4D2"/>
+                  <a:srgbClr val="FFF0D4"/>
                 </a:solidFill>
                 <a:latin typeface="Microsoft YaHei" pitchFamily="34" charset="0"/>
                 <a:ea typeface="Microsoft YaHei" pitchFamily="34" charset="-122"/>
@@ -8148,6 +8211,13 @@
           </a:prstGeom>
           <a:noFill/>
           <a:ln/>
+          <a:effectLst>
+            <a:outerShdw sx="100000" sy="100000" kx="0" ky="0" algn="bl" rotWithShape="0" blurRad="152400" dist="25400" dir="5400000">
+              <a:srgbClr val="5A1A00">
+                <a:alpha val="42000"/>
+              </a:srgbClr>
+            </a:outerShdw>
+          </a:effectLst>
         </p:spPr>
         <p:txBody>
           <a:bodyPr wrap="square" lIns="0" tIns="0" rIns="0" bIns="0" rtlCol="0" anchor="ctr"/>
@@ -8230,6 +8300,13 @@
           </a:prstGeom>
           <a:noFill/>
           <a:ln/>
+          <a:effectLst>
+            <a:outerShdw sx="100000" sy="100000" kx="0" ky="0" algn="bl" rotWithShape="0" blurRad="88900" dist="25400" dir="5400000">
+              <a:srgbClr val="5A1A00">
+                <a:alpha val="50000"/>
+              </a:srgbClr>
+            </a:outerShdw>
+          </a:effectLst>
         </p:spPr>
         <p:txBody>
           <a:bodyPr wrap="square" lIns="0" tIns="0" rIns="0" bIns="0" rtlCol="0" anchor="t"/>
@@ -8237,14 +8314,14 @@
           <a:p>
             <a:pPr indent="0" marL="0">
               <a:lnSpc>
-                <a:spcPts val="2500"/>
+                <a:spcPts val="2600"/>
               </a:lnSpc>
               <a:buNone/>
             </a:pPr>
             <a:r>
-              <a:rPr lang="en-US" sz="1600" dirty="0">
-                <a:solidFill>
-                  <a:srgbClr val="FFE3C9"/>
+              <a:rPr lang="en-US" sz="1650" dirty="0">
+                <a:solidFill>
+                  <a:srgbClr val="FFFFFF"/>
                 </a:solidFill>
                 <a:latin typeface="Microsoft YaHei" pitchFamily="34" charset="0"/>
                 <a:ea typeface="Microsoft YaHei" pitchFamily="34" charset="-122"/>
@@ -8252,7 +8329,7 @@
               </a:rPr>
               <a:t>弹性 = 你能不能改它　　非胁迫 = 你不改它，它也不整你</a:t>
             </a:r>
-            <a:endParaRPr lang="en-US" sz="1600" dirty="0"/>
+            <a:endParaRPr lang="en-US" sz="1650" dirty="0"/>
           </a:p>
         </p:txBody>
       </p:sp>
@@ -8310,7 +8387,7 @@
             <a:avLst/>
           </a:prstGeom>
           <a:solidFill>
-            <a:srgbClr val="FF7A1A"/>
+            <a:srgbClr val="FF8A1E"/>
           </a:solidFill>
           <a:ln/>
         </p:spPr>
@@ -8342,7 +8419,7 @@
             <a:r>
               <a:rPr lang="en-US" sz="1200" b="1" spc="200" kern="0" dirty="0">
                 <a:solidFill>
-                  <a:srgbClr val="7A736C"/>
+                  <a:srgbClr val="9A7550"/>
                 </a:solidFill>
                 <a:latin typeface="Microsoft YaHei" pitchFamily="34" charset="0"/>
                 <a:ea typeface="Microsoft YaHei" pitchFamily="34" charset="-122"/>
@@ -8420,7 +8497,7 @@
             <a:r>
               <a:rPr lang="en-US" sz="1600" dirty="0">
                 <a:solidFill>
-                  <a:srgbClr val="7A736C"/>
+                  <a:srgbClr val="9A7550"/>
                 </a:solidFill>
                 <a:latin typeface="Microsoft YaHei" pitchFamily="34" charset="0"/>
                 <a:ea typeface="Microsoft YaHei" pitchFamily="34" charset="-122"/>
@@ -8459,7 +8536,7 @@
             <a:r>
               <a:rPr lang="en-US" sz="1100" dirty="0">
                 <a:solidFill>
-                  <a:srgbClr val="7A736C"/>
+                  <a:srgbClr val="9A7550"/>
                 </a:solidFill>
                 <a:latin typeface="Microsoft YaHei" pitchFamily="34" charset="0"/>
                 <a:ea typeface="Microsoft YaHei" pitchFamily="34" charset="-122"/>
@@ -8486,7 +8563,7 @@
           </p:nvPr>
         </p:nvGraphicFramePr>
         <p:xfrm>
-          <a:off x="548640" y="2286000"/>
+          <a:off x="548640" y="2240280"/>
           <a:ext cx="11064240" cy="914400"/>
         </p:xfrm>
         <a:graphic>
@@ -8499,7 +8576,7 @@
                 <a:gridCol w="3017520"/>
                 <a:gridCol w="2926080"/>
               </a:tblGrid>
-              <a:tr h="713232">
+              <a:tr h="658368">
                 <a:tc>
                   <a:txBody>
                     <a:bodyPr/>
@@ -8509,9 +8586,9 @@
                         <a:buNone/>
                       </a:pPr>
                       <a:r>
-                        <a:rPr lang="en-US" sz="1350" b="1" dirty="0">
+                        <a:rPr lang="en-US" sz="1300" b="1" dirty="0">
                           <a:solidFill>
-                            <a:srgbClr val="3A332E"/>
+                            <a:srgbClr val="4A3B2C"/>
                           </a:solidFill>
                           <a:latin typeface="Microsoft YaHei" pitchFamily="34" charset="0"/>
                           <a:ea typeface="Microsoft YaHei" pitchFamily="34" charset="-122"/>
@@ -8519,7 +8596,7 @@
                         </a:rPr>
                         <a:t>原来的问法</a:t>
                       </a:r>
-                      <a:endParaRPr lang="en-US" sz="1350" dirty="0">
+                      <a:endParaRPr lang="en-US" sz="1300" dirty="0">
                         <a:latin typeface="Microsoft YaHei" charset="0"/>
                         <a:ea typeface="Microsoft YaHei" charset="0"/>
                         <a:cs typeface="Microsoft YaHei" charset="0"/>
@@ -8529,7 +8606,7 @@
                   <a:tcPr marL="91440" marR="91440" marT="45720" marB="45720" anchor="ctr">
                     <a:lnL w="12700" cap="flat" cmpd="sng" algn="ctr">
                       <a:solidFill>
-                        <a:srgbClr val="E2D9CC"/>
+                        <a:srgbClr val="F0DCBC"/>
                       </a:solidFill>
                       <a:prstDash val="solid"/>
                       <a:round/>
@@ -8538,7 +8615,7 @@
                     </a:lnL>
                     <a:lnR w="12700" cap="flat" cmpd="sng" algn="ctr">
                       <a:solidFill>
-                        <a:srgbClr val="E2D9CC"/>
+                        <a:srgbClr val="F0DCBC"/>
                       </a:solidFill>
                       <a:prstDash val="solid"/>
                       <a:round/>
@@ -8547,7 +8624,7 @@
                     </a:lnR>
                     <a:lnT w="12700" cap="flat" cmpd="sng" algn="ctr">
                       <a:solidFill>
-                        <a:srgbClr val="E2D9CC"/>
+                        <a:srgbClr val="F0DCBC"/>
                       </a:solidFill>
                       <a:prstDash val="solid"/>
                       <a:round/>
@@ -8556,7 +8633,7 @@
                     </a:lnT>
                     <a:lnB w="12700" cap="flat" cmpd="sng" algn="ctr">
                       <a:solidFill>
-                        <a:srgbClr val="E2D9CC"/>
+                        <a:srgbClr val="F0DCBC"/>
                       </a:solidFill>
                       <a:prstDash val="solid"/>
                       <a:round/>
@@ -8577,9 +8654,9 @@
                         <a:buNone/>
                       </a:pPr>
                       <a:r>
-                        <a:rPr lang="en-US" sz="1350" b="1" dirty="0">
+                        <a:rPr lang="en-US" sz="1300" b="1" dirty="0">
                           <a:solidFill>
-                            <a:srgbClr val="3A332E"/>
+                            <a:srgbClr val="4A3B2C"/>
                           </a:solidFill>
                           <a:latin typeface="Microsoft YaHei" pitchFamily="34" charset="0"/>
                           <a:ea typeface="Microsoft YaHei" pitchFamily="34" charset="-122"/>
@@ -8587,7 +8664,7 @@
                         </a:rPr>
                         <a:t>它其实在问什么</a:t>
                       </a:r>
-                      <a:endParaRPr lang="en-US" sz="1350" dirty="0">
+                      <a:endParaRPr lang="en-US" sz="1300" dirty="0">
                         <a:latin typeface="Microsoft YaHei" charset="0"/>
                         <a:ea typeface="Microsoft YaHei" charset="0"/>
                         <a:cs typeface="Microsoft YaHei" charset="0"/>
@@ -8597,7 +8674,7 @@
                   <a:tcPr marL="91440" marR="91440" marT="45720" marB="45720" anchor="ctr">
                     <a:lnL w="12700" cap="flat" cmpd="sng" algn="ctr">
                       <a:solidFill>
-                        <a:srgbClr val="E2D9CC"/>
+                        <a:srgbClr val="F0DCBC"/>
                       </a:solidFill>
                       <a:prstDash val="solid"/>
                       <a:round/>
@@ -8606,7 +8683,7 @@
                     </a:lnL>
                     <a:lnR w="12700" cap="flat" cmpd="sng" algn="ctr">
                       <a:solidFill>
-                        <a:srgbClr val="E2D9CC"/>
+                        <a:srgbClr val="F0DCBC"/>
                       </a:solidFill>
                       <a:prstDash val="solid"/>
                       <a:round/>
@@ -8615,7 +8692,7 @@
                     </a:lnR>
                     <a:lnT w="12700" cap="flat" cmpd="sng" algn="ctr">
                       <a:solidFill>
-                        <a:srgbClr val="E2D9CC"/>
+                        <a:srgbClr val="F0DCBC"/>
                       </a:solidFill>
                       <a:prstDash val="solid"/>
                       <a:round/>
@@ -8624,7 +8701,7 @@
                     </a:lnT>
                     <a:lnB w="12700" cap="flat" cmpd="sng" algn="ctr">
                       <a:solidFill>
-                        <a:srgbClr val="E2D9CC"/>
+                        <a:srgbClr val="F0DCBC"/>
                       </a:solidFill>
                       <a:prstDash val="solid"/>
                       <a:round/>
@@ -8645,9 +8722,9 @@
                         <a:buNone/>
                       </a:pPr>
                       <a:r>
-                        <a:rPr lang="en-US" sz="1350" b="1" dirty="0">
+                        <a:rPr lang="en-US" sz="1300" b="1" dirty="0">
                           <a:solidFill>
-                            <a:srgbClr val="E63329"/>
+                            <a:srgbClr val="F03A21"/>
                           </a:solidFill>
                           <a:latin typeface="Microsoft YaHei" pitchFamily="34" charset="0"/>
                           <a:ea typeface="Microsoft YaHei" pitchFamily="34" charset="-122"/>
@@ -8655,7 +8732,7 @@
                         </a:rPr>
                         <a:t>不合格长什么样</a:t>
                       </a:r>
-                      <a:endParaRPr lang="en-US" sz="1350" dirty="0">
+                      <a:endParaRPr lang="en-US" sz="1300" dirty="0">
                         <a:latin typeface="Microsoft YaHei" charset="0"/>
                         <a:ea typeface="Microsoft YaHei" charset="0"/>
                         <a:cs typeface="Microsoft YaHei" charset="0"/>
@@ -8665,7 +8742,7 @@
                   <a:tcPr marL="91440" marR="91440" marT="45720" marB="45720" anchor="ctr">
                     <a:lnL w="12700" cap="flat" cmpd="sng" algn="ctr">
                       <a:solidFill>
-                        <a:srgbClr val="E2D9CC"/>
+                        <a:srgbClr val="F0DCBC"/>
                       </a:solidFill>
                       <a:prstDash val="solid"/>
                       <a:round/>
@@ -8674,7 +8751,7 @@
                     </a:lnL>
                     <a:lnR w="12700" cap="flat" cmpd="sng" algn="ctr">
                       <a:solidFill>
-                        <a:srgbClr val="E2D9CC"/>
+                        <a:srgbClr val="F0DCBC"/>
                       </a:solidFill>
                       <a:prstDash val="solid"/>
                       <a:round/>
@@ -8683,7 +8760,7 @@
                     </a:lnR>
                     <a:lnT w="12700" cap="flat" cmpd="sng" algn="ctr">
                       <a:solidFill>
-                        <a:srgbClr val="E2D9CC"/>
+                        <a:srgbClr val="F0DCBC"/>
                       </a:solidFill>
                       <a:prstDash val="solid"/>
                       <a:round/>
@@ -8692,7 +8769,7 @@
                     </a:lnT>
                     <a:lnB w="12700" cap="flat" cmpd="sng" algn="ctr">
                       <a:solidFill>
-                        <a:srgbClr val="E2D9CC"/>
+                        <a:srgbClr val="F0DCBC"/>
                       </a:solidFill>
                       <a:prstDash val="solid"/>
                       <a:round/>
@@ -8713,7 +8790,7 @@
                         <a:buNone/>
                       </a:pPr>
                       <a:r>
-                        <a:rPr lang="en-US" sz="1350" b="1" dirty="0">
+                        <a:rPr lang="en-US" sz="1300" b="1" dirty="0">
                           <a:solidFill>
                             <a:srgbClr val="1E7F42"/>
                           </a:solidFill>
@@ -8723,7 +8800,7 @@
                         </a:rPr>
                         <a:t>合格长什么样</a:t>
                       </a:r>
-                      <a:endParaRPr lang="en-US" sz="1350" dirty="0">
+                      <a:endParaRPr lang="en-US" sz="1300" dirty="0">
                         <a:latin typeface="Microsoft YaHei" charset="0"/>
                         <a:ea typeface="Microsoft YaHei" charset="0"/>
                         <a:cs typeface="Microsoft YaHei" charset="0"/>
@@ -8733,7 +8810,7 @@
                   <a:tcPr marL="91440" marR="91440" marT="45720" marB="45720" anchor="ctr">
                     <a:lnL w="12700" cap="flat" cmpd="sng" algn="ctr">
                       <a:solidFill>
-                        <a:srgbClr val="E2D9CC"/>
+                        <a:srgbClr val="F0DCBC"/>
                       </a:solidFill>
                       <a:prstDash val="solid"/>
                       <a:round/>
@@ -8742,7 +8819,7 @@
                     </a:lnL>
                     <a:lnR w="12700" cap="flat" cmpd="sng" algn="ctr">
                       <a:solidFill>
-                        <a:srgbClr val="E2D9CC"/>
+                        <a:srgbClr val="F0DCBC"/>
                       </a:solidFill>
                       <a:prstDash val="solid"/>
                       <a:round/>
@@ -8751,7 +8828,7 @@
                     </a:lnR>
                     <a:lnT w="12700" cap="flat" cmpd="sng" algn="ctr">
                       <a:solidFill>
-                        <a:srgbClr val="E2D9CC"/>
+                        <a:srgbClr val="F0DCBC"/>
                       </a:solidFill>
                       <a:prstDash val="solid"/>
                       <a:round/>
@@ -8760,7 +8837,7 @@
                     </a:lnT>
                     <a:lnB w="12700" cap="flat" cmpd="sng" algn="ctr">
                       <a:solidFill>
-                        <a:srgbClr val="E2D9CC"/>
+                        <a:srgbClr val="F0DCBC"/>
                       </a:solidFill>
                       <a:prstDash val="solid"/>
                       <a:round/>
@@ -8773,7 +8850,7 @@
                   </a:tcPr>
                 </a:tc>
               </a:tr>
-              <a:tr h="713232">
+              <a:tr h="658368">
                 <a:tc>
                   <a:txBody>
                     <a:bodyPr/>
@@ -8783,9 +8860,9 @@
                         <a:buNone/>
                       </a:pPr>
                       <a:r>
-                        <a:rPr lang="en-US" sz="1350" dirty="0">
+                        <a:rPr lang="en-US" sz="1300" dirty="0">
                           <a:solidFill>
-                            <a:srgbClr val="3A332E"/>
+                            <a:srgbClr val="4A3B2C"/>
                           </a:solidFill>
                           <a:latin typeface="Microsoft YaHei" pitchFamily="34" charset="0"/>
                           <a:ea typeface="Microsoft YaHei" pitchFamily="34" charset="-122"/>
@@ -8793,7 +8870,7 @@
                         </a:rPr>
                         <a:t>① 能自由设定使用时长吗</a:t>
                       </a:r>
-                      <a:endParaRPr lang="en-US" sz="1350" dirty="0">
+                      <a:endParaRPr lang="en-US" sz="1300" dirty="0">
                         <a:latin typeface="Microsoft YaHei" charset="0"/>
                         <a:ea typeface="Microsoft YaHei" charset="0"/>
                         <a:cs typeface="Microsoft YaHei" charset="0"/>
@@ -8803,7 +8880,7 @@
                   <a:tcPr marL="91440" marR="91440" marT="45720" marB="45720" anchor="ctr">
                     <a:lnL w="12700" cap="flat" cmpd="sng" algn="ctr">
                       <a:solidFill>
-                        <a:srgbClr val="E2D9CC"/>
+                        <a:srgbClr val="F0DCBC"/>
                       </a:solidFill>
                       <a:prstDash val="solid"/>
                       <a:round/>
@@ -8812,7 +8889,7 @@
                     </a:lnL>
                     <a:lnR w="12700" cap="flat" cmpd="sng" algn="ctr">
                       <a:solidFill>
-                        <a:srgbClr val="E2D9CC"/>
+                        <a:srgbClr val="F0DCBC"/>
                       </a:solidFill>
                       <a:prstDash val="solid"/>
                       <a:round/>
@@ -8821,7 +8898,7 @@
                     </a:lnR>
                     <a:lnT w="12700" cap="flat" cmpd="sng" algn="ctr">
                       <a:solidFill>
-                        <a:srgbClr val="E2D9CC"/>
+                        <a:srgbClr val="F0DCBC"/>
                       </a:solidFill>
                       <a:prstDash val="solid"/>
                       <a:round/>
@@ -8830,7 +8907,7 @@
                     </a:lnT>
                     <a:lnB w="12700" cap="flat" cmpd="sng" algn="ctr">
                       <a:solidFill>
-                        <a:srgbClr val="E2D9CC"/>
+                        <a:srgbClr val="F0DCBC"/>
                       </a:solidFill>
                       <a:prstDash val="solid"/>
                       <a:round/>
@@ -8851,9 +8928,9 @@
                         <a:buNone/>
                       </a:pPr>
                       <a:r>
-                        <a:rPr lang="en-US" sz="1350" dirty="0">
+                        <a:rPr lang="en-US" sz="1300" dirty="0">
                           <a:solidFill>
-                            <a:srgbClr val="3A332E"/>
+                            <a:srgbClr val="4A3B2C"/>
                           </a:solidFill>
                           <a:latin typeface="Microsoft YaHei" pitchFamily="34" charset="0"/>
                           <a:ea typeface="Microsoft YaHei" pitchFamily="34" charset="-122"/>
@@ -8861,7 +8938,7 @@
                         </a:rPr>
                         <a:t>谁在定规矩？</a:t>
                       </a:r>
-                      <a:endParaRPr lang="en-US" sz="1350" dirty="0">
+                      <a:endParaRPr lang="en-US" sz="1300" dirty="0">
                         <a:latin typeface="Microsoft YaHei" charset="0"/>
                         <a:ea typeface="Microsoft YaHei" charset="0"/>
                         <a:cs typeface="Microsoft YaHei" charset="0"/>
@@ -8871,7 +8948,7 @@
                   <a:tcPr marL="91440" marR="91440" marT="45720" marB="45720" anchor="ctr">
                     <a:lnL w="12700" cap="flat" cmpd="sng" algn="ctr">
                       <a:solidFill>
-                        <a:srgbClr val="E2D9CC"/>
+                        <a:srgbClr val="F0DCBC"/>
                       </a:solidFill>
                       <a:prstDash val="solid"/>
                       <a:round/>
@@ -8880,7 +8957,7 @@
                     </a:lnL>
                     <a:lnR w="12700" cap="flat" cmpd="sng" algn="ctr">
                       <a:solidFill>
-                        <a:srgbClr val="E2D9CC"/>
+                        <a:srgbClr val="F0DCBC"/>
                       </a:solidFill>
                       <a:prstDash val="solid"/>
                       <a:round/>
@@ -8889,7 +8966,7 @@
                     </a:lnR>
                     <a:lnT w="12700" cap="flat" cmpd="sng" algn="ctr">
                       <a:solidFill>
-                        <a:srgbClr val="E2D9CC"/>
+                        <a:srgbClr val="F0DCBC"/>
                       </a:solidFill>
                       <a:prstDash val="solid"/>
                       <a:round/>
@@ -8898,7 +8975,7 @@
                     </a:lnT>
                     <a:lnB w="12700" cap="flat" cmpd="sng" algn="ctr">
                       <a:solidFill>
-                        <a:srgbClr val="E2D9CC"/>
+                        <a:srgbClr val="F0DCBC"/>
                       </a:solidFill>
                       <a:prstDash val="solid"/>
                       <a:round/>
@@ -8919,9 +8996,9 @@
                         <a:buNone/>
                       </a:pPr>
                       <a:r>
-                        <a:rPr lang="en-US" sz="1350" dirty="0">
+                        <a:rPr lang="en-US" sz="1300" dirty="0">
                           <a:solidFill>
-                            <a:srgbClr val="3A332E"/>
+                            <a:srgbClr val="4A3B2C"/>
                           </a:solidFill>
                           <a:latin typeface="Microsoft YaHei" pitchFamily="34" charset="0"/>
                           <a:ea typeface="Microsoft YaHei" pitchFamily="34" charset="-122"/>
@@ -8929,7 +9006,7 @@
                         </a:rPr>
                         <a:t>写死每天 1 小时，或者藏在五层设置里</a:t>
                       </a:r>
-                      <a:endParaRPr lang="en-US" sz="1350" dirty="0">
+                      <a:endParaRPr lang="en-US" sz="1300" dirty="0">
                         <a:latin typeface="Microsoft YaHei" charset="0"/>
                         <a:ea typeface="Microsoft YaHei" charset="0"/>
                         <a:cs typeface="Microsoft YaHei" charset="0"/>
@@ -8939,7 +9016,7 @@
                   <a:tcPr marL="91440" marR="91440" marT="45720" marB="45720" anchor="ctr">
                     <a:lnL w="12700" cap="flat" cmpd="sng" algn="ctr">
                       <a:solidFill>
-                        <a:srgbClr val="E2D9CC"/>
+                        <a:srgbClr val="F0DCBC"/>
                       </a:solidFill>
                       <a:prstDash val="solid"/>
                       <a:round/>
@@ -8948,7 +9025,7 @@
                     </a:lnL>
                     <a:lnR w="12700" cap="flat" cmpd="sng" algn="ctr">
                       <a:solidFill>
-                        <a:srgbClr val="E2D9CC"/>
+                        <a:srgbClr val="F0DCBC"/>
                       </a:solidFill>
                       <a:prstDash val="solid"/>
                       <a:round/>
@@ -8957,7 +9034,7 @@
                     </a:lnR>
                     <a:lnT w="12700" cap="flat" cmpd="sng" algn="ctr">
                       <a:solidFill>
-                        <a:srgbClr val="E2D9CC"/>
+                        <a:srgbClr val="F0DCBC"/>
                       </a:solidFill>
                       <a:prstDash val="solid"/>
                       <a:round/>
@@ -8966,7 +9043,7 @@
                     </a:lnT>
                     <a:lnB w="12700" cap="flat" cmpd="sng" algn="ctr">
                       <a:solidFill>
-                        <a:srgbClr val="E2D9CC"/>
+                        <a:srgbClr val="F0DCBC"/>
                       </a:solidFill>
                       <a:prstDash val="solid"/>
                       <a:round/>
@@ -8987,9 +9064,9 @@
                         <a:buNone/>
                       </a:pPr>
                       <a:r>
-                        <a:rPr lang="en-US" sz="1350" dirty="0">
+                        <a:rPr lang="en-US" sz="1300" dirty="0">
                           <a:solidFill>
-                            <a:srgbClr val="3A332E"/>
+                            <a:srgbClr val="4A3B2C"/>
                           </a:solidFill>
                           <a:latin typeface="Microsoft YaHei" pitchFamily="34" charset="0"/>
                           <a:ea typeface="Microsoft YaHei" pitchFamily="34" charset="-122"/>
@@ -8997,7 +9074,7 @@
                         </a:rPr>
                         <a:t>打开就能改，改小了也不影响功能</a:t>
                       </a:r>
-                      <a:endParaRPr lang="en-US" sz="1350" dirty="0">
+                      <a:endParaRPr lang="en-US" sz="1300" dirty="0">
                         <a:latin typeface="Microsoft YaHei" charset="0"/>
                         <a:ea typeface="Microsoft YaHei" charset="0"/>
                         <a:cs typeface="Microsoft YaHei" charset="0"/>
@@ -9007,7 +9084,7 @@
                   <a:tcPr marL="91440" marR="91440" marT="45720" marB="45720" anchor="ctr">
                     <a:lnL w="12700" cap="flat" cmpd="sng" algn="ctr">
                       <a:solidFill>
-                        <a:srgbClr val="E2D9CC"/>
+                        <a:srgbClr val="F0DCBC"/>
                       </a:solidFill>
                       <a:prstDash val="solid"/>
                       <a:round/>
@@ -9016,7 +9093,7 @@
                     </a:lnL>
                     <a:lnR w="12700" cap="flat" cmpd="sng" algn="ctr">
                       <a:solidFill>
-                        <a:srgbClr val="E2D9CC"/>
+                        <a:srgbClr val="F0DCBC"/>
                       </a:solidFill>
                       <a:prstDash val="solid"/>
                       <a:round/>
@@ -9025,7 +9102,7 @@
                     </a:lnR>
                     <a:lnT w="12700" cap="flat" cmpd="sng" algn="ctr">
                       <a:solidFill>
-                        <a:srgbClr val="E2D9CC"/>
+                        <a:srgbClr val="F0DCBC"/>
                       </a:solidFill>
                       <a:prstDash val="solid"/>
                       <a:round/>
@@ -9034,7 +9111,7 @@
                     </a:lnT>
                     <a:lnB w="12700" cap="flat" cmpd="sng" algn="ctr">
                       <a:solidFill>
-                        <a:srgbClr val="E2D9CC"/>
+                        <a:srgbClr val="F0DCBC"/>
                       </a:solidFill>
                       <a:prstDash val="solid"/>
                       <a:round/>
@@ -9047,7 +9124,7 @@
                   </a:tcPr>
                 </a:tc>
               </a:tr>
-              <a:tr h="713232">
+              <a:tr h="658368">
                 <a:tc>
                   <a:txBody>
                     <a:bodyPr/>
@@ -9057,9 +9134,9 @@
                         <a:buNone/>
                       </a:pPr>
                       <a:r>
-                        <a:rPr lang="en-US" sz="1350" dirty="0">
+                        <a:rPr lang="en-US" sz="1300" dirty="0">
                           <a:solidFill>
-                            <a:srgbClr val="3A332E"/>
+                            <a:srgbClr val="4A3B2C"/>
                           </a:solidFill>
                           <a:latin typeface="Microsoft YaHei" pitchFamily="34" charset="0"/>
                           <a:ea typeface="Microsoft YaHei" pitchFamily="34" charset="-122"/>
@@ -9067,7 +9144,7 @@
                         </a:rPr>
                         <a:t>② 未完成有惩罚吗</a:t>
                       </a:r>
-                      <a:endParaRPr lang="en-US" sz="1350" dirty="0">
+                      <a:endParaRPr lang="en-US" sz="1300" dirty="0">
                         <a:latin typeface="Microsoft YaHei" charset="0"/>
                         <a:ea typeface="Microsoft YaHei" charset="0"/>
                         <a:cs typeface="Microsoft YaHei" charset="0"/>
@@ -9077,7 +9154,7 @@
                   <a:tcPr marL="91440" marR="91440" marT="45720" marB="45720" anchor="ctr">
                     <a:lnL w="12700" cap="flat" cmpd="sng" algn="ctr">
                       <a:solidFill>
-                        <a:srgbClr val="E2D9CC"/>
+                        <a:srgbClr val="F0DCBC"/>
                       </a:solidFill>
                       <a:prstDash val="solid"/>
                       <a:round/>
@@ -9086,7 +9163,7 @@
                     </a:lnL>
                     <a:lnR w="12700" cap="flat" cmpd="sng" algn="ctr">
                       <a:solidFill>
-                        <a:srgbClr val="E2D9CC"/>
+                        <a:srgbClr val="F0DCBC"/>
                       </a:solidFill>
                       <a:prstDash val="solid"/>
                       <a:round/>
@@ -9095,7 +9172,7 @@
                     </a:lnR>
                     <a:lnT w="12700" cap="flat" cmpd="sng" algn="ctr">
                       <a:solidFill>
-                        <a:srgbClr val="E2D9CC"/>
+                        <a:srgbClr val="F0DCBC"/>
                       </a:solidFill>
                       <a:prstDash val="solid"/>
                       <a:round/>
@@ -9104,7 +9181,7 @@
                     </a:lnT>
                     <a:lnB w="12700" cap="flat" cmpd="sng" algn="ctr">
                       <a:solidFill>
-                        <a:srgbClr val="E2D9CC"/>
+                        <a:srgbClr val="F0DCBC"/>
                       </a:solidFill>
                       <a:prstDash val="solid"/>
                       <a:round/>
@@ -9125,9 +9202,9 @@
                         <a:buNone/>
                       </a:pPr>
                       <a:r>
-                        <a:rPr lang="en-US" sz="1350" dirty="0">
+                        <a:rPr lang="en-US" sz="1300" dirty="0">
                           <a:solidFill>
-                            <a:srgbClr val="3A332E"/>
+                            <a:srgbClr val="4A3B2C"/>
                           </a:solidFill>
                           <a:latin typeface="Microsoft YaHei" pitchFamily="34" charset="0"/>
                           <a:ea typeface="Microsoft YaHei" pitchFamily="34" charset="-122"/>
@@ -9135,7 +9212,7 @@
                         </a:rPr>
                         <a:t>搞砸了会怎样？</a:t>
                       </a:r>
-                      <a:endParaRPr lang="en-US" sz="1350" dirty="0">
+                      <a:endParaRPr lang="en-US" sz="1300" dirty="0">
                         <a:latin typeface="Microsoft YaHei" charset="0"/>
                         <a:ea typeface="Microsoft YaHei" charset="0"/>
                         <a:cs typeface="Microsoft YaHei" charset="0"/>
@@ -9145,7 +9222,7 @@
                   <a:tcPr marL="91440" marR="91440" marT="45720" marB="45720" anchor="ctr">
                     <a:lnL w="12700" cap="flat" cmpd="sng" algn="ctr">
                       <a:solidFill>
-                        <a:srgbClr val="E2D9CC"/>
+                        <a:srgbClr val="F0DCBC"/>
                       </a:solidFill>
                       <a:prstDash val="solid"/>
                       <a:round/>
@@ -9154,7 +9231,7 @@
                     </a:lnL>
                     <a:lnR w="12700" cap="flat" cmpd="sng" algn="ctr">
                       <a:solidFill>
-                        <a:srgbClr val="E2D9CC"/>
+                        <a:srgbClr val="F0DCBC"/>
                       </a:solidFill>
                       <a:prstDash val="solid"/>
                       <a:round/>
@@ -9163,7 +9240,7 @@
                     </a:lnR>
                     <a:lnT w="12700" cap="flat" cmpd="sng" algn="ctr">
                       <a:solidFill>
-                        <a:srgbClr val="E2D9CC"/>
+                        <a:srgbClr val="F0DCBC"/>
                       </a:solidFill>
                       <a:prstDash val="solid"/>
                       <a:round/>
@@ -9172,7 +9249,7 @@
                     </a:lnT>
                     <a:lnB w="12700" cap="flat" cmpd="sng" algn="ctr">
                       <a:solidFill>
-                        <a:srgbClr val="E2D9CC"/>
+                        <a:srgbClr val="F0DCBC"/>
                       </a:solidFill>
                       <a:prstDash val="solid"/>
                       <a:round/>
@@ -9193,9 +9270,9 @@
                         <a:buNone/>
                       </a:pPr>
                       <a:r>
-                        <a:rPr lang="en-US" sz="1350" dirty="0">
+                        <a:rPr lang="en-US" sz="1300" dirty="0">
                           <a:solidFill>
-                            <a:srgbClr val="3A332E"/>
+                            <a:srgbClr val="4A3B2C"/>
                           </a:solidFill>
                           <a:latin typeface="Microsoft YaHei" pitchFamily="34" charset="0"/>
                           <a:ea typeface="Microsoft YaHei" pitchFamily="34" charset="-122"/>
@@ -9203,7 +9280,7 @@
                         </a:rPr>
                         <a:t>47 天记录清零、掉段位</a:t>
                       </a:r>
-                      <a:endParaRPr lang="en-US" sz="1350" dirty="0">
+                      <a:endParaRPr lang="en-US" sz="1300" dirty="0">
                         <a:latin typeface="Microsoft YaHei" charset="0"/>
                         <a:ea typeface="Microsoft YaHei" charset="0"/>
                         <a:cs typeface="Microsoft YaHei" charset="0"/>
@@ -9213,7 +9290,7 @@
                   <a:tcPr marL="91440" marR="91440" marT="45720" marB="45720" anchor="ctr">
                     <a:lnL w="12700" cap="flat" cmpd="sng" algn="ctr">
                       <a:solidFill>
-                        <a:srgbClr val="E2D9CC"/>
+                        <a:srgbClr val="F0DCBC"/>
                       </a:solidFill>
                       <a:prstDash val="solid"/>
                       <a:round/>
@@ -9222,7 +9299,7 @@
                     </a:lnL>
                     <a:lnR w="12700" cap="flat" cmpd="sng" algn="ctr">
                       <a:solidFill>
-                        <a:srgbClr val="E2D9CC"/>
+                        <a:srgbClr val="F0DCBC"/>
                       </a:solidFill>
                       <a:prstDash val="solid"/>
                       <a:round/>
@@ -9231,7 +9308,7 @@
                     </a:lnR>
                     <a:lnT w="12700" cap="flat" cmpd="sng" algn="ctr">
                       <a:solidFill>
-                        <a:srgbClr val="E2D9CC"/>
+                        <a:srgbClr val="F0DCBC"/>
                       </a:solidFill>
                       <a:prstDash val="solid"/>
                       <a:round/>
@@ -9240,7 +9317,7 @@
                     </a:lnT>
                     <a:lnB w="12700" cap="flat" cmpd="sng" algn="ctr">
                       <a:solidFill>
-                        <a:srgbClr val="E2D9CC"/>
+                        <a:srgbClr val="F0DCBC"/>
                       </a:solidFill>
                       <a:prstDash val="solid"/>
                       <a:round/>
@@ -9261,9 +9338,9 @@
                         <a:buNone/>
                       </a:pPr>
                       <a:r>
-                        <a:rPr lang="en-US" sz="1350" dirty="0">
+                        <a:rPr lang="en-US" sz="1300" dirty="0">
                           <a:solidFill>
-                            <a:srgbClr val="3A332E"/>
+                            <a:srgbClr val="4A3B2C"/>
                           </a:solidFill>
                           <a:latin typeface="Microsoft YaHei" pitchFamily="34" charset="0"/>
                           <a:ea typeface="Microsoft YaHei" pitchFamily="34" charset="-122"/>
@@ -9271,7 +9348,7 @@
                         </a:rPr>
                         <a:t>断了就断了，进度还在，可以补</a:t>
                       </a:r>
-                      <a:endParaRPr lang="en-US" sz="1350" dirty="0">
+                      <a:endParaRPr lang="en-US" sz="1300" dirty="0">
                         <a:latin typeface="Microsoft YaHei" charset="0"/>
                         <a:ea typeface="Microsoft YaHei" charset="0"/>
                         <a:cs typeface="Microsoft YaHei" charset="0"/>
@@ -9281,7 +9358,7 @@
                   <a:tcPr marL="91440" marR="91440" marT="45720" marB="45720" anchor="ctr">
                     <a:lnL w="12700" cap="flat" cmpd="sng" algn="ctr">
                       <a:solidFill>
-                        <a:srgbClr val="E2D9CC"/>
+                        <a:srgbClr val="F0DCBC"/>
                       </a:solidFill>
                       <a:prstDash val="solid"/>
                       <a:round/>
@@ -9290,7 +9367,7 @@
                     </a:lnL>
                     <a:lnR w="12700" cap="flat" cmpd="sng" algn="ctr">
                       <a:solidFill>
-                        <a:srgbClr val="E2D9CC"/>
+                        <a:srgbClr val="F0DCBC"/>
                       </a:solidFill>
                       <a:prstDash val="solid"/>
                       <a:round/>
@@ -9299,7 +9376,7 @@
                     </a:lnR>
                     <a:lnT w="12700" cap="flat" cmpd="sng" algn="ctr">
                       <a:solidFill>
-                        <a:srgbClr val="E2D9CC"/>
+                        <a:srgbClr val="F0DCBC"/>
                       </a:solidFill>
                       <a:prstDash val="solid"/>
                       <a:round/>
@@ -9308,7 +9385,7 @@
                     </a:lnT>
                     <a:lnB w="12700" cap="flat" cmpd="sng" algn="ctr">
                       <a:solidFill>
-                        <a:srgbClr val="E2D9CC"/>
+                        <a:srgbClr val="F0DCBC"/>
                       </a:solidFill>
                       <a:prstDash val="solid"/>
                       <a:round/>
@@ -9321,7 +9398,7 @@
                   </a:tcPr>
                 </a:tc>
               </a:tr>
-              <a:tr h="713232">
+              <a:tr h="658368">
                 <a:tc>
                   <a:txBody>
                     <a:bodyPr/>
@@ -9331,9 +9408,9 @@
                         <a:buNone/>
                       </a:pPr>
                       <a:r>
-                        <a:rPr lang="en-US" sz="1350" dirty="0">
+                        <a:rPr lang="en-US" sz="1300" dirty="0">
                           <a:solidFill>
-                            <a:srgbClr val="3A332E"/>
+                            <a:srgbClr val="4A3B2C"/>
                           </a:solidFill>
                           <a:latin typeface="Microsoft YaHei" pitchFamily="34" charset="0"/>
                           <a:ea typeface="Microsoft YaHei" pitchFamily="34" charset="-122"/>
@@ -9341,7 +9418,7 @@
                         </a:rPr>
                         <a:t>③ 允许休息日吗</a:t>
                       </a:r>
-                      <a:endParaRPr lang="en-US" sz="1350" dirty="0">
+                      <a:endParaRPr lang="en-US" sz="1300" dirty="0">
                         <a:latin typeface="Microsoft YaHei" charset="0"/>
                         <a:ea typeface="Microsoft YaHei" charset="0"/>
                         <a:cs typeface="Microsoft YaHei" charset="0"/>
@@ -9351,7 +9428,7 @@
                   <a:tcPr marL="91440" marR="91440" marT="45720" marB="45720" anchor="ctr">
                     <a:lnL w="12700" cap="flat" cmpd="sng" algn="ctr">
                       <a:solidFill>
-                        <a:srgbClr val="E2D9CC"/>
+                        <a:srgbClr val="F0DCBC"/>
                       </a:solidFill>
                       <a:prstDash val="solid"/>
                       <a:round/>
@@ -9360,7 +9437,7 @@
                     </a:lnL>
                     <a:lnR w="12700" cap="flat" cmpd="sng" algn="ctr">
                       <a:solidFill>
-                        <a:srgbClr val="E2D9CC"/>
+                        <a:srgbClr val="F0DCBC"/>
                       </a:solidFill>
                       <a:prstDash val="solid"/>
                       <a:round/>
@@ -9369,7 +9446,7 @@
                     </a:lnR>
                     <a:lnT w="12700" cap="flat" cmpd="sng" algn="ctr">
                       <a:solidFill>
-                        <a:srgbClr val="E2D9CC"/>
+                        <a:srgbClr val="F0DCBC"/>
                       </a:solidFill>
                       <a:prstDash val="solid"/>
                       <a:round/>
@@ -9378,7 +9455,7 @@
                     </a:lnT>
                     <a:lnB w="12700" cap="flat" cmpd="sng" algn="ctr">
                       <a:solidFill>
-                        <a:srgbClr val="E2D9CC"/>
+                        <a:srgbClr val="F0DCBC"/>
                       </a:solidFill>
                       <a:prstDash val="solid"/>
                       <a:round/>
@@ -9399,9 +9476,9 @@
                         <a:buNone/>
                       </a:pPr>
                       <a:r>
-                        <a:rPr lang="en-US" sz="1350" dirty="0">
+                        <a:rPr lang="en-US" sz="1300" dirty="0">
                           <a:solidFill>
-                            <a:srgbClr val="3A332E"/>
+                            <a:srgbClr val="4A3B2C"/>
                           </a:solidFill>
                           <a:latin typeface="Microsoft YaHei" pitchFamily="34" charset="0"/>
                           <a:ea typeface="Microsoft YaHei" pitchFamily="34" charset="-122"/>
@@ -9409,7 +9486,7 @@
                         </a:rPr>
                         <a:t>能不能光明正大地不用？</a:t>
                       </a:r>
-                      <a:endParaRPr lang="en-US" sz="1350" dirty="0">
+                      <a:endParaRPr lang="en-US" sz="1300" dirty="0">
                         <a:latin typeface="Microsoft YaHei" charset="0"/>
                         <a:ea typeface="Microsoft YaHei" charset="0"/>
                         <a:cs typeface="Microsoft YaHei" charset="0"/>
@@ -9419,7 +9496,7 @@
                   <a:tcPr marL="91440" marR="91440" marT="45720" marB="45720" anchor="ctr">
                     <a:lnL w="12700" cap="flat" cmpd="sng" algn="ctr">
                       <a:solidFill>
-                        <a:srgbClr val="E2D9CC"/>
+                        <a:srgbClr val="F0DCBC"/>
                       </a:solidFill>
                       <a:prstDash val="solid"/>
                       <a:round/>
@@ -9428,7 +9505,7 @@
                     </a:lnL>
                     <a:lnR w="12700" cap="flat" cmpd="sng" algn="ctr">
                       <a:solidFill>
-                        <a:srgbClr val="E2D9CC"/>
+                        <a:srgbClr val="F0DCBC"/>
                       </a:solidFill>
                       <a:prstDash val="solid"/>
                       <a:round/>
@@ -9437,7 +9514,7 @@
                     </a:lnR>
                     <a:lnT w="12700" cap="flat" cmpd="sng" algn="ctr">
                       <a:solidFill>
-                        <a:srgbClr val="E2D9CC"/>
+                        <a:srgbClr val="F0DCBC"/>
                       </a:solidFill>
                       <a:prstDash val="solid"/>
                       <a:round/>
@@ -9446,7 +9523,7 @@
                     </a:lnT>
                     <a:lnB w="12700" cap="flat" cmpd="sng" algn="ctr">
                       <a:solidFill>
-                        <a:srgbClr val="E2D9CC"/>
+                        <a:srgbClr val="F0DCBC"/>
                       </a:solidFill>
                       <a:prstDash val="solid"/>
                       <a:round/>
@@ -9467,9 +9544,9 @@
                         <a:buNone/>
                       </a:pPr>
                       <a:r>
-                        <a:rPr lang="en-US" sz="1350" dirty="0">
+                        <a:rPr lang="en-US" sz="1300" dirty="0">
                           <a:solidFill>
-                            <a:srgbClr val="3A332E"/>
+                            <a:srgbClr val="4A3B2C"/>
                           </a:solidFill>
                           <a:latin typeface="Microsoft YaHei" pitchFamily="34" charset="0"/>
                           <a:ea typeface="Microsoft YaHei" pitchFamily="34" charset="-122"/>
@@ -9477,7 +9554,7 @@
                         </a:rPr>
                         <a:t>休息 = 断签 = 掉级 + 被推送催</a:t>
                       </a:r>
-                      <a:endParaRPr lang="en-US" sz="1350" dirty="0">
+                      <a:endParaRPr lang="en-US" sz="1300" dirty="0">
                         <a:latin typeface="Microsoft YaHei" charset="0"/>
                         <a:ea typeface="Microsoft YaHei" charset="0"/>
                         <a:cs typeface="Microsoft YaHei" charset="0"/>
@@ -9487,7 +9564,7 @@
                   <a:tcPr marL="91440" marR="91440" marT="45720" marB="45720" anchor="ctr">
                     <a:lnL w="12700" cap="flat" cmpd="sng" algn="ctr">
                       <a:solidFill>
-                        <a:srgbClr val="E2D9CC"/>
+                        <a:srgbClr val="F0DCBC"/>
                       </a:solidFill>
                       <a:prstDash val="solid"/>
                       <a:round/>
@@ -9496,7 +9573,7 @@
                     </a:lnL>
                     <a:lnR w="12700" cap="flat" cmpd="sng" algn="ctr">
                       <a:solidFill>
-                        <a:srgbClr val="E2D9CC"/>
+                        <a:srgbClr val="F0DCBC"/>
                       </a:solidFill>
                       <a:prstDash val="solid"/>
                       <a:round/>
@@ -9505,7 +9582,7 @@
                     </a:lnR>
                     <a:lnT w="12700" cap="flat" cmpd="sng" algn="ctr">
                       <a:solidFill>
-                        <a:srgbClr val="E2D9CC"/>
+                        <a:srgbClr val="F0DCBC"/>
                       </a:solidFill>
                       <a:prstDash val="solid"/>
                       <a:round/>
@@ -9514,7 +9591,7 @@
                     </a:lnT>
                     <a:lnB w="12700" cap="flat" cmpd="sng" algn="ctr">
                       <a:solidFill>
-                        <a:srgbClr val="E2D9CC"/>
+                        <a:srgbClr val="F0DCBC"/>
                       </a:solidFill>
                       <a:prstDash val="solid"/>
                       <a:round/>
@@ -9535,9 +9612,9 @@
                         <a:buNone/>
                       </a:pPr>
                       <a:r>
-                        <a:rPr lang="en-US" sz="1350" dirty="0">
+                        <a:rPr lang="en-US" sz="1300" dirty="0">
                           <a:solidFill>
-                            <a:srgbClr val="3A332E"/>
+                            <a:srgbClr val="4A3B2C"/>
                           </a:solidFill>
                           <a:latin typeface="Microsoft YaHei" pitchFamily="34" charset="0"/>
                           <a:ea typeface="Microsoft YaHei" pitchFamily="34" charset="-122"/>
@@ -9545,7 +9622,7 @@
                         </a:rPr>
                         <a:t>休息日是事先能设的功能，不掉级不催</a:t>
                       </a:r>
-                      <a:endParaRPr lang="en-US" sz="1350" dirty="0">
+                      <a:endParaRPr lang="en-US" sz="1300" dirty="0">
                         <a:latin typeface="Microsoft YaHei" charset="0"/>
                         <a:ea typeface="Microsoft YaHei" charset="0"/>
                         <a:cs typeface="Microsoft YaHei" charset="0"/>
@@ -9555,7 +9632,7 @@
                   <a:tcPr marL="91440" marR="91440" marT="45720" marB="45720" anchor="ctr">
                     <a:lnL w="12700" cap="flat" cmpd="sng" algn="ctr">
                       <a:solidFill>
-                        <a:srgbClr val="E2D9CC"/>
+                        <a:srgbClr val="F0DCBC"/>
                       </a:solidFill>
                       <a:prstDash val="solid"/>
                       <a:round/>
@@ -9564,7 +9641,7 @@
                     </a:lnL>
                     <a:lnR w="12700" cap="flat" cmpd="sng" algn="ctr">
                       <a:solidFill>
-                        <a:srgbClr val="E2D9CC"/>
+                        <a:srgbClr val="F0DCBC"/>
                       </a:solidFill>
                       <a:prstDash val="solid"/>
                       <a:round/>
@@ -9573,7 +9650,7 @@
                     </a:lnR>
                     <a:lnT w="12700" cap="flat" cmpd="sng" algn="ctr">
                       <a:solidFill>
-                        <a:srgbClr val="E2D9CC"/>
+                        <a:srgbClr val="F0DCBC"/>
                       </a:solidFill>
                       <a:prstDash val="solid"/>
                       <a:round/>
@@ -9582,7 +9659,7 @@
                     </a:lnT>
                     <a:lnB w="12700" cap="flat" cmpd="sng" algn="ctr">
                       <a:solidFill>
-                        <a:srgbClr val="E2D9CC"/>
+                        <a:srgbClr val="F0DCBC"/>
                       </a:solidFill>
                       <a:prstDash val="solid"/>
                       <a:round/>
@@ -9595,7 +9672,7 @@
                   </a:tcPr>
                 </a:tc>
               </a:tr>
-              <a:tr h="713232">
+              <a:tr h="658368">
                 <a:tc>
                   <a:txBody>
                     <a:bodyPr/>
@@ -9605,9 +9682,9 @@
                         <a:buNone/>
                       </a:pPr>
                       <a:r>
-                        <a:rPr lang="en-US" sz="1350" dirty="0">
+                        <a:rPr lang="en-US" sz="1300" dirty="0">
                           <a:solidFill>
-                            <a:srgbClr val="3A332E"/>
+                            <a:srgbClr val="4A3B2C"/>
                           </a:solidFill>
                           <a:latin typeface="Microsoft YaHei" pitchFamily="34" charset="0"/>
                           <a:ea typeface="Microsoft YaHei" pitchFamily="34" charset="-122"/>
@@ -9615,7 +9692,7 @@
                         </a:rPr>
                         <a:t>④ 酬赏让人焦虑吗</a:t>
                       </a:r>
-                      <a:endParaRPr lang="en-US" sz="1350" dirty="0">
+                      <a:endParaRPr lang="en-US" sz="1300" dirty="0">
                         <a:latin typeface="Microsoft YaHei" charset="0"/>
                         <a:ea typeface="Microsoft YaHei" charset="0"/>
                         <a:cs typeface="Microsoft YaHei" charset="0"/>
@@ -9625,7 +9702,7 @@
                   <a:tcPr marL="91440" marR="91440" marT="45720" marB="45720" anchor="ctr">
                     <a:lnL w="12700" cap="flat" cmpd="sng" algn="ctr">
                       <a:solidFill>
-                        <a:srgbClr val="E2D9CC"/>
+                        <a:srgbClr val="F0DCBC"/>
                       </a:solidFill>
                       <a:prstDash val="solid"/>
                       <a:round/>
@@ -9634,7 +9711,7 @@
                     </a:lnL>
                     <a:lnR w="12700" cap="flat" cmpd="sng" algn="ctr">
                       <a:solidFill>
-                        <a:srgbClr val="E2D9CC"/>
+                        <a:srgbClr val="F0DCBC"/>
                       </a:solidFill>
                       <a:prstDash val="solid"/>
                       <a:round/>
@@ -9643,7 +9720,7 @@
                     </a:lnR>
                     <a:lnT w="12700" cap="flat" cmpd="sng" algn="ctr">
                       <a:solidFill>
-                        <a:srgbClr val="E2D9CC"/>
+                        <a:srgbClr val="F0DCBC"/>
                       </a:solidFill>
                       <a:prstDash val="solid"/>
                       <a:round/>
@@ -9652,7 +9729,7 @@
                     </a:lnT>
                     <a:lnB w="12700" cap="flat" cmpd="sng" algn="ctr">
                       <a:solidFill>
-                        <a:srgbClr val="E2D9CC"/>
+                        <a:srgbClr val="F0DCBC"/>
                       </a:solidFill>
                       <a:prstDash val="solid"/>
                       <a:round/>
@@ -9673,9 +9750,9 @@
                         <a:buNone/>
                       </a:pPr>
                       <a:r>
-                        <a:rPr lang="en-US" sz="1350" dirty="0">
+                        <a:rPr lang="en-US" sz="1300" dirty="0">
                           <a:solidFill>
-                            <a:srgbClr val="3A332E"/>
+                            <a:srgbClr val="4A3B2C"/>
                           </a:solidFill>
                           <a:latin typeface="Microsoft YaHei" pitchFamily="34" charset="0"/>
                           <a:ea typeface="Microsoft YaHei" pitchFamily="34" charset="-122"/>
@@ -9683,7 +9760,7 @@
                         </a:rPr>
                         <a:t>奖励是让你开心，还是让你怕？</a:t>
                       </a:r>
-                      <a:endParaRPr lang="en-US" sz="1350" dirty="0">
+                      <a:endParaRPr lang="en-US" sz="1300" dirty="0">
                         <a:latin typeface="Microsoft YaHei" charset="0"/>
                         <a:ea typeface="Microsoft YaHei" charset="0"/>
                         <a:cs typeface="Microsoft YaHei" charset="0"/>
@@ -9693,7 +9770,7 @@
                   <a:tcPr marL="91440" marR="91440" marT="45720" marB="45720" anchor="ctr">
                     <a:lnL w="12700" cap="flat" cmpd="sng" algn="ctr">
                       <a:solidFill>
-                        <a:srgbClr val="E2D9CC"/>
+                        <a:srgbClr val="F0DCBC"/>
                       </a:solidFill>
                       <a:prstDash val="solid"/>
                       <a:round/>
@@ -9702,7 +9779,7 @@
                     </a:lnL>
                     <a:lnR w="12700" cap="flat" cmpd="sng" algn="ctr">
                       <a:solidFill>
-                        <a:srgbClr val="E2D9CC"/>
+                        <a:srgbClr val="F0DCBC"/>
                       </a:solidFill>
                       <a:prstDash val="solid"/>
                       <a:round/>
@@ -9711,7 +9788,7 @@
                     </a:lnR>
                     <a:lnT w="12700" cap="flat" cmpd="sng" algn="ctr">
                       <a:solidFill>
-                        <a:srgbClr val="E2D9CC"/>
+                        <a:srgbClr val="F0DCBC"/>
                       </a:solidFill>
                       <a:prstDash val="solid"/>
                       <a:round/>
@@ -9720,7 +9797,7 @@
                     </a:lnT>
                     <a:lnB w="12700" cap="flat" cmpd="sng" algn="ctr">
                       <a:solidFill>
-                        <a:srgbClr val="E2D9CC"/>
+                        <a:srgbClr val="F0DCBC"/>
                       </a:solidFill>
                       <a:prstDash val="solid"/>
                       <a:round/>
@@ -9741,9 +9818,9 @@
                         <a:buNone/>
                       </a:pPr>
                       <a:r>
-                        <a:rPr lang="en-US" sz="1350" dirty="0">
+                        <a:rPr lang="en-US" sz="1300" dirty="0">
                           <a:solidFill>
-                            <a:srgbClr val="3A332E"/>
+                            <a:srgbClr val="4A3B2C"/>
                           </a:solidFill>
                           <a:latin typeface="Microsoft YaHei" pitchFamily="34" charset="0"/>
                           <a:ea typeface="Microsoft YaHei" pitchFamily="34" charset="-122"/>
@@ -9751,7 +9828,7 @@
                         </a:rPr>
                         <a:t>抽卡、限时、「差一点就进前十」</a:t>
                       </a:r>
-                      <a:endParaRPr lang="en-US" sz="1350" dirty="0">
+                      <a:endParaRPr lang="en-US" sz="1300" dirty="0">
                         <a:latin typeface="Microsoft YaHei" charset="0"/>
                         <a:ea typeface="Microsoft YaHei" charset="0"/>
                         <a:cs typeface="Microsoft YaHei" charset="0"/>
@@ -9761,7 +9838,7 @@
                   <a:tcPr marL="91440" marR="91440" marT="45720" marB="45720" anchor="ctr">
                     <a:lnL w="12700" cap="flat" cmpd="sng" algn="ctr">
                       <a:solidFill>
-                        <a:srgbClr val="E2D9CC"/>
+                        <a:srgbClr val="F0DCBC"/>
                       </a:solidFill>
                       <a:prstDash val="solid"/>
                       <a:round/>
@@ -9770,7 +9847,7 @@
                     </a:lnL>
                     <a:lnR w="12700" cap="flat" cmpd="sng" algn="ctr">
                       <a:solidFill>
-                        <a:srgbClr val="E2D9CC"/>
+                        <a:srgbClr val="F0DCBC"/>
                       </a:solidFill>
                       <a:prstDash val="solid"/>
                       <a:round/>
@@ -9779,7 +9856,7 @@
                     </a:lnR>
                     <a:lnT w="12700" cap="flat" cmpd="sng" algn="ctr">
                       <a:solidFill>
-                        <a:srgbClr val="E2D9CC"/>
+                        <a:srgbClr val="F0DCBC"/>
                       </a:solidFill>
                       <a:prstDash val="solid"/>
                       <a:round/>
@@ -9788,7 +9865,7 @@
                     </a:lnT>
                     <a:lnB w="12700" cap="flat" cmpd="sng" algn="ctr">
                       <a:solidFill>
-                        <a:srgbClr val="E2D9CC"/>
+                        <a:srgbClr val="F0DCBC"/>
                       </a:solidFill>
                       <a:prstDash val="solid"/>
                       <a:round/>
@@ -9809,9 +9886,9 @@
                         <a:buNone/>
                       </a:pPr>
                       <a:r>
-                        <a:rPr lang="en-US" sz="1350" dirty="0">
+                        <a:rPr lang="en-US" sz="1300" dirty="0">
                           <a:solidFill>
-                            <a:srgbClr val="3A332E"/>
+                            <a:srgbClr val="4A3B2C"/>
                           </a:solidFill>
                           <a:latin typeface="Microsoft YaHei" pitchFamily="34" charset="0"/>
                           <a:ea typeface="Microsoft YaHei" pitchFamily="34" charset="-122"/>
@@ -9819,7 +9896,7 @@
                         </a:rPr>
                         <a:t>这月 25kg，上月 20kg。可关，不比</a:t>
                       </a:r>
-                      <a:endParaRPr lang="en-US" sz="1350" dirty="0">
+                      <a:endParaRPr lang="en-US" sz="1300" dirty="0">
                         <a:latin typeface="Microsoft YaHei" charset="0"/>
                         <a:ea typeface="Microsoft YaHei" charset="0"/>
                         <a:cs typeface="Microsoft YaHei" charset="0"/>
@@ -9829,7 +9906,7 @@
                   <a:tcPr marL="91440" marR="91440" marT="45720" marB="45720" anchor="ctr">
                     <a:lnL w="12700" cap="flat" cmpd="sng" algn="ctr">
                       <a:solidFill>
-                        <a:srgbClr val="E2D9CC"/>
+                        <a:srgbClr val="F0DCBC"/>
                       </a:solidFill>
                       <a:prstDash val="solid"/>
                       <a:round/>
@@ -9838,7 +9915,7 @@
                     </a:lnL>
                     <a:lnR w="12700" cap="flat" cmpd="sng" algn="ctr">
                       <a:solidFill>
-                        <a:srgbClr val="E2D9CC"/>
+                        <a:srgbClr val="F0DCBC"/>
                       </a:solidFill>
                       <a:prstDash val="solid"/>
                       <a:round/>
@@ -9847,7 +9924,7 @@
                     </a:lnR>
                     <a:lnT w="12700" cap="flat" cmpd="sng" algn="ctr">
                       <a:solidFill>
-                        <a:srgbClr val="E2D9CC"/>
+                        <a:srgbClr val="F0DCBC"/>
                       </a:solidFill>
                       <a:prstDash val="solid"/>
                       <a:round/>
@@ -9856,7 +9933,7 @@
                     </a:lnT>
                     <a:lnB w="12700" cap="flat" cmpd="sng" algn="ctr">
                       <a:solidFill>
-                        <a:srgbClr val="E2D9CC"/>
+                        <a:srgbClr val="F0DCBC"/>
                       </a:solidFill>
                       <a:prstDash val="solid"/>
                       <a:round/>
@@ -9927,7 +10004,7 @@
             <a:avLst/>
           </a:prstGeom>
           <a:solidFill>
-            <a:srgbClr val="FF7A1A"/>
+            <a:srgbClr val="FF8A1E"/>
           </a:solidFill>
           <a:ln/>
         </p:spPr>
@@ -9959,7 +10036,7 @@
             <a:r>
               <a:rPr lang="en-US" sz="1200" b="1" spc="200" kern="0" dirty="0">
                 <a:solidFill>
-                  <a:srgbClr val="7A736C"/>
+                  <a:srgbClr val="9A7550"/>
                 </a:solidFill>
                 <a:latin typeface="Microsoft YaHei" pitchFamily="34" charset="0"/>
                 <a:ea typeface="Microsoft YaHei" pitchFamily="34" charset="-122"/>
@@ -10037,7 +10114,7 @@
             <a:r>
               <a:rPr lang="en-US" sz="1600" dirty="0">
                 <a:solidFill>
-                  <a:srgbClr val="7A736C"/>
+                  <a:srgbClr val="9A7550"/>
                 </a:solidFill>
                 <a:latin typeface="Microsoft YaHei" pitchFamily="34" charset="0"/>
                 <a:ea typeface="Microsoft YaHei" pitchFamily="34" charset="-122"/>
@@ -10076,7 +10153,7 @@
             <a:r>
               <a:rPr lang="en-US" sz="1100" dirty="0">
                 <a:solidFill>
-                  <a:srgbClr val="7A736C"/>
+                  <a:srgbClr val="9A7550"/>
                 </a:solidFill>
                 <a:latin typeface="Microsoft YaHei" pitchFamily="34" charset="0"/>
                 <a:ea typeface="Microsoft YaHei" pitchFamily="34" charset="-122"/>
@@ -10103,7 +10180,7 @@
             <a:avLst/>
           </a:prstGeom>
           <a:solidFill>
-            <a:srgbClr val="E63329"/>
+            <a:srgbClr val="F03A21"/>
           </a:solidFill>
           <a:ln/>
         </p:spPr>
@@ -10197,7 +10274,7 @@
             <a:r>
               <a:rPr lang="en-US" sz="1210" dirty="0">
                 <a:solidFill>
-                  <a:srgbClr val="3A332E"/>
+                  <a:srgbClr val="4A3B2C"/>
                 </a:solidFill>
                 <a:latin typeface="Microsoft YaHei" pitchFamily="34" charset="0"/>
                 <a:ea typeface="Microsoft YaHei" pitchFamily="34" charset="-122"/>
@@ -10224,7 +10301,7 @@
             <a:avLst/>
           </a:prstGeom>
           <a:solidFill>
-            <a:srgbClr val="E63329"/>
+            <a:srgbClr val="F03A21"/>
           </a:solidFill>
           <a:ln/>
         </p:spPr>
@@ -10318,7 +10395,7 @@
             <a:r>
               <a:rPr lang="en-US" sz="1210" dirty="0">
                 <a:solidFill>
-                  <a:srgbClr val="3A332E"/>
+                  <a:srgbClr val="4A3B2C"/>
                 </a:solidFill>
                 <a:latin typeface="Microsoft YaHei" pitchFamily="34" charset="0"/>
                 <a:ea typeface="Microsoft YaHei" pitchFamily="34" charset="-122"/>
@@ -10345,7 +10422,7 @@
             <a:avLst/>
           </a:prstGeom>
           <a:solidFill>
-            <a:srgbClr val="E63329"/>
+            <a:srgbClr val="F03A21"/>
           </a:solidFill>
           <a:ln/>
         </p:spPr>
@@ -10439,7 +10516,7 @@
             <a:r>
               <a:rPr lang="en-US" sz="1210" dirty="0">
                 <a:solidFill>
-                  <a:srgbClr val="3A332E"/>
+                  <a:srgbClr val="4A3B2C"/>
                 </a:solidFill>
                 <a:latin typeface="Microsoft YaHei" pitchFamily="34" charset="0"/>
                 <a:ea typeface="Microsoft YaHei" pitchFamily="34" charset="-122"/>
@@ -10466,7 +10543,7 @@
             <a:avLst/>
           </a:prstGeom>
           <a:solidFill>
-            <a:srgbClr val="E63329"/>
+            <a:srgbClr val="F03A21"/>
           </a:solidFill>
           <a:ln/>
         </p:spPr>
@@ -10560,7 +10637,7 @@
             <a:r>
               <a:rPr lang="en-US" sz="1210" dirty="0">
                 <a:solidFill>
-                  <a:srgbClr val="3A332E"/>
+                  <a:srgbClr val="4A3B2C"/>
                 </a:solidFill>
                 <a:latin typeface="Microsoft YaHei" pitchFamily="34" charset="0"/>
                 <a:ea typeface="Microsoft YaHei" pitchFamily="34" charset="-122"/>
@@ -10587,7 +10664,7 @@
             <a:avLst/>
           </a:prstGeom>
           <a:solidFill>
-            <a:srgbClr val="E63329"/>
+            <a:srgbClr val="F03A21"/>
           </a:solidFill>
           <a:ln/>
         </p:spPr>
@@ -10681,7 +10758,7 @@
             <a:r>
               <a:rPr lang="en-US" sz="1210" dirty="0">
                 <a:solidFill>
-                  <a:srgbClr val="3A332E"/>
+                  <a:srgbClr val="4A3B2C"/>
                 </a:solidFill>
                 <a:latin typeface="Microsoft YaHei" pitchFamily="34" charset="0"/>
                 <a:ea typeface="Microsoft YaHei" pitchFamily="34" charset="-122"/>
@@ -10747,7 +10824,7 @@
             <a:avLst/>
           </a:prstGeom>
           <a:solidFill>
-            <a:srgbClr val="FF7A1A"/>
+            <a:srgbClr val="FF8A1E"/>
           </a:solidFill>
           <a:ln/>
         </p:spPr>
@@ -10779,7 +10856,7 @@
             <a:r>
               <a:rPr lang="en-US" sz="1200" b="1" spc="200" kern="0" dirty="0">
                 <a:solidFill>
-                  <a:srgbClr val="7A736C"/>
+                  <a:srgbClr val="9A7550"/>
                 </a:solidFill>
                 <a:latin typeface="Microsoft YaHei" pitchFamily="34" charset="0"/>
                 <a:ea typeface="Microsoft YaHei" pitchFamily="34" charset="-122"/>
@@ -10857,7 +10934,7 @@
             <a:r>
               <a:rPr lang="en-US" sz="1100" dirty="0">
                 <a:solidFill>
-                  <a:srgbClr val="7A736C"/>
+                  <a:srgbClr val="9A7550"/>
                 </a:solidFill>
                 <a:latin typeface="Microsoft YaHei" pitchFamily="34" charset="0"/>
                 <a:ea typeface="Microsoft YaHei" pitchFamily="34" charset="-122"/>
@@ -10890,14 +10967,14 @@
           </a:solidFill>
           <a:ln w="12700">
             <a:solidFill>
-              <a:srgbClr val="E2D9CC"/>
+              <a:srgbClr val="F0DCBC"/>
             </a:solidFill>
             <a:prstDash val="solid"/>
           </a:ln>
           <a:effectLst>
-            <a:outerShdw sx="100000" sy="100000" kx="0" ky="0" algn="bl" rotWithShape="0" blurRad="127000" dist="25400" dir="5400000">
-              <a:srgbClr val="9A8C7A">
-                <a:alpha val="10000"/>
+            <a:outerShdw sx="100000" sy="100000" kx="0" ky="0" algn="bl" rotWithShape="0" blurRad="152400" dist="25400" dir="5400000">
+              <a:srgbClr val="C99A5E">
+                <a:alpha val="14000"/>
               </a:srgbClr>
             </a:outerShdw>
           </a:effectLst>
@@ -10930,7 +11007,7 @@
             <a:r>
               <a:rPr lang="en-US" sz="1300" b="1" spc="100" kern="0" dirty="0">
                 <a:solidFill>
-                  <a:srgbClr val="E63329"/>
+                  <a:srgbClr val="F03A21"/>
                 </a:solidFill>
                 <a:latin typeface="Microsoft YaHei" pitchFamily="34" charset="0"/>
                 <a:ea typeface="Microsoft YaHei" pitchFamily="34" charset="-122"/>
@@ -11014,7 +11091,7 @@
             <a:r>
               <a:rPr lang="en-US" sz="1250" dirty="0">
                 <a:solidFill>
-                  <a:srgbClr val="3A332E"/>
+                  <a:srgbClr val="4A3B2C"/>
                 </a:solidFill>
                 <a:latin typeface="Microsoft YaHei" pitchFamily="34" charset="0"/>
                 <a:ea typeface="Microsoft YaHei" pitchFamily="34" charset="-122"/>
@@ -11043,7 +11120,7 @@
             <a:r>
               <a:rPr lang="en-US" sz="1250" dirty="0">
                 <a:solidFill>
-                  <a:srgbClr val="3A332E"/>
+                  <a:srgbClr val="4A3B2C"/>
                 </a:solidFill>
                 <a:latin typeface="Microsoft YaHei" pitchFamily="34" charset="0"/>
                 <a:ea typeface="Microsoft YaHei" pitchFamily="34" charset="-122"/>
@@ -11063,7 +11140,7 @@
             <a:r>
               <a:rPr lang="en-US" sz="1250" dirty="0">
                 <a:solidFill>
-                  <a:srgbClr val="3A332E"/>
+                  <a:srgbClr val="4A3B2C"/>
                 </a:solidFill>
                 <a:latin typeface="Microsoft YaHei" pitchFamily="34" charset="0"/>
                 <a:ea typeface="Microsoft YaHei" pitchFamily="34" charset="-122"/>
@@ -11096,14 +11173,14 @@
           </a:solidFill>
           <a:ln w="12700">
             <a:solidFill>
-              <a:srgbClr val="E2D9CC"/>
+              <a:srgbClr val="F0DCBC"/>
             </a:solidFill>
             <a:prstDash val="solid"/>
           </a:ln>
           <a:effectLst>
-            <a:outerShdw sx="100000" sy="100000" kx="0" ky="0" algn="bl" rotWithShape="0" blurRad="127000" dist="25400" dir="5400000">
-              <a:srgbClr val="9A8C7A">
-                <a:alpha val="10000"/>
+            <a:outerShdw sx="100000" sy="100000" kx="0" ky="0" algn="bl" rotWithShape="0" blurRad="152400" dist="25400" dir="5400000">
+              <a:srgbClr val="C99A5E">
+                <a:alpha val="14000"/>
               </a:srgbClr>
             </a:outerShdw>
           </a:effectLst>
@@ -11136,7 +11213,7 @@
             <a:r>
               <a:rPr lang="en-US" sz="1300" b="1" spc="100" kern="0" dirty="0">
                 <a:solidFill>
-                  <a:srgbClr val="FF7A1A"/>
+                  <a:srgbClr val="FF8A1E"/>
                 </a:solidFill>
                 <a:latin typeface="Microsoft YaHei" pitchFamily="34" charset="0"/>
                 <a:ea typeface="Microsoft YaHei" pitchFamily="34" charset="-122"/>
@@ -11220,7 +11297,7 @@
             <a:r>
               <a:rPr lang="en-US" sz="1250" dirty="0">
                 <a:solidFill>
-                  <a:srgbClr val="3A332E"/>
+                  <a:srgbClr val="4A3B2C"/>
                 </a:solidFill>
                 <a:latin typeface="Microsoft YaHei" pitchFamily="34" charset="0"/>
                 <a:ea typeface="Microsoft YaHei" pitchFamily="34" charset="-122"/>
@@ -11240,7 +11317,7 @@
             <a:r>
               <a:rPr lang="en-US" sz="1250" dirty="0">
                 <a:solidFill>
-                  <a:srgbClr val="3A332E"/>
+                  <a:srgbClr val="4A3B2C"/>
                 </a:solidFill>
                 <a:latin typeface="Microsoft YaHei" pitchFamily="34" charset="0"/>
                 <a:ea typeface="Microsoft YaHei" pitchFamily="34" charset="-122"/>
@@ -11269,7 +11346,7 @@
             <a:r>
               <a:rPr lang="en-US" sz="1250" dirty="0">
                 <a:solidFill>
-                  <a:srgbClr val="3A332E"/>
+                  <a:srgbClr val="4A3B2C"/>
                 </a:solidFill>
                 <a:latin typeface="Microsoft YaHei" pitchFamily="34" charset="0"/>
                 <a:ea typeface="Microsoft YaHei" pitchFamily="34" charset="-122"/>
@@ -11289,7 +11366,7 @@
             <a:r>
               <a:rPr lang="en-US" sz="1250" dirty="0">
                 <a:solidFill>
-                  <a:srgbClr val="3A332E"/>
+                  <a:srgbClr val="4A3B2C"/>
                 </a:solidFill>
                 <a:latin typeface="Microsoft YaHei" pitchFamily="34" charset="0"/>
                 <a:ea typeface="Microsoft YaHei" pitchFamily="34" charset="-122"/>
@@ -11322,14 +11399,14 @@
           </a:solidFill>
           <a:ln w="12700">
             <a:solidFill>
-              <a:srgbClr val="E2D9CC"/>
+              <a:srgbClr val="F0DCBC"/>
             </a:solidFill>
             <a:prstDash val="solid"/>
           </a:ln>
           <a:effectLst>
-            <a:outerShdw sx="100000" sy="100000" kx="0" ky="0" algn="bl" rotWithShape="0" blurRad="127000" dist="25400" dir="5400000">
-              <a:srgbClr val="9A8C7A">
-                <a:alpha val="10000"/>
+            <a:outerShdw sx="100000" sy="100000" kx="0" ky="0" algn="bl" rotWithShape="0" blurRad="152400" dist="25400" dir="5400000">
+              <a:srgbClr val="C99A5E">
+                <a:alpha val="14000"/>
               </a:srgbClr>
             </a:outerShdw>
           </a:effectLst>
@@ -11446,7 +11523,7 @@
             <a:r>
               <a:rPr lang="en-US" sz="1250" dirty="0">
                 <a:solidFill>
-                  <a:srgbClr val="3A332E"/>
+                  <a:srgbClr val="4A3B2C"/>
                 </a:solidFill>
                 <a:latin typeface="Microsoft YaHei" pitchFamily="34" charset="0"/>
                 <a:ea typeface="Microsoft YaHei" pitchFamily="34" charset="-122"/>
@@ -11475,7 +11552,7 @@
             <a:r>
               <a:rPr lang="en-US" sz="1250" dirty="0">
                 <a:solidFill>
-                  <a:srgbClr val="3A332E"/>
+                  <a:srgbClr val="4A3B2C"/>
                 </a:solidFill>
                 <a:latin typeface="Microsoft YaHei" pitchFamily="34" charset="0"/>
                 <a:ea typeface="Microsoft YaHei" pitchFamily="34" charset="-122"/>
@@ -11495,7 +11572,7 @@
             <a:r>
               <a:rPr lang="en-US" sz="1250" dirty="0">
                 <a:solidFill>
-                  <a:srgbClr val="3A332E"/>
+                  <a:srgbClr val="4A3B2C"/>
                 </a:solidFill>
                 <a:latin typeface="Microsoft YaHei" pitchFamily="34" charset="0"/>
                 <a:ea typeface="Microsoft YaHei" pitchFamily="34" charset="-122"/>
@@ -11561,7 +11638,7 @@
             <a:avLst/>
           </a:prstGeom>
           <a:solidFill>
-            <a:srgbClr val="FF7A1A"/>
+            <a:srgbClr val="FF8A1E"/>
           </a:solidFill>
           <a:ln/>
         </p:spPr>
@@ -11593,7 +11670,7 @@
             <a:r>
               <a:rPr lang="en-US" sz="1200" b="1" spc="200" kern="0" dirty="0">
                 <a:solidFill>
-                  <a:srgbClr val="7A736C"/>
+                  <a:srgbClr val="9A7550"/>
                 </a:solidFill>
                 <a:latin typeface="Microsoft YaHei" pitchFamily="34" charset="0"/>
                 <a:ea typeface="Microsoft YaHei" pitchFamily="34" charset="-122"/>
@@ -11671,7 +11748,7 @@
             <a:r>
               <a:rPr lang="en-US" sz="1100" dirty="0">
                 <a:solidFill>
-                  <a:srgbClr val="7A736C"/>
+                  <a:srgbClr val="9A7550"/>
                 </a:solidFill>
                 <a:latin typeface="Microsoft YaHei" pitchFamily="34" charset="0"/>
                 <a:ea typeface="Microsoft YaHei" pitchFamily="34" charset="-122"/>
@@ -11704,14 +11781,14 @@
           </a:solidFill>
           <a:ln w="12700">
             <a:solidFill>
-              <a:srgbClr val="E2D9CC"/>
+              <a:srgbClr val="F0DCBC"/>
             </a:solidFill>
             <a:prstDash val="solid"/>
           </a:ln>
           <a:effectLst>
-            <a:outerShdw sx="100000" sy="100000" kx="0" ky="0" algn="bl" rotWithShape="0" blurRad="127000" dist="25400" dir="5400000">
-              <a:srgbClr val="9A8C7A">
-                <a:alpha val="10000"/>
+            <a:outerShdw sx="100000" sy="100000" kx="0" ky="0" algn="bl" rotWithShape="0" blurRad="152400" dist="25400" dir="5400000">
+              <a:srgbClr val="C99A5E">
+                <a:alpha val="14000"/>
               </a:srgbClr>
             </a:outerShdw>
           </a:effectLst>
@@ -11744,7 +11821,7 @@
             <a:r>
               <a:rPr lang="en-US" sz="1300" b="1" spc="100" kern="0" dirty="0">
                 <a:solidFill>
-                  <a:srgbClr val="E63329"/>
+                  <a:srgbClr val="F03A21"/>
                 </a:solidFill>
                 <a:latin typeface="Microsoft YaHei" pitchFamily="34" charset="0"/>
                 <a:ea typeface="Microsoft YaHei" pitchFamily="34" charset="-122"/>
@@ -11828,7 +11905,7 @@
             <a:r>
               <a:rPr lang="en-US" sz="1250" dirty="0">
                 <a:solidFill>
-                  <a:srgbClr val="3A332E"/>
+                  <a:srgbClr val="4A3B2C"/>
                 </a:solidFill>
                 <a:latin typeface="Microsoft YaHei" pitchFamily="34" charset="0"/>
                 <a:ea typeface="Microsoft YaHei" pitchFamily="34" charset="-122"/>
@@ -11848,7 +11925,7 @@
             <a:r>
               <a:rPr lang="en-US" sz="1250" dirty="0">
                 <a:solidFill>
-                  <a:srgbClr val="3A332E"/>
+                  <a:srgbClr val="4A3B2C"/>
                 </a:solidFill>
                 <a:latin typeface="Microsoft YaHei" pitchFamily="34" charset="0"/>
                 <a:ea typeface="Microsoft YaHei" pitchFamily="34" charset="-122"/>
@@ -11881,14 +11958,14 @@
           </a:solidFill>
           <a:ln w="12700">
             <a:solidFill>
-              <a:srgbClr val="E2D9CC"/>
+              <a:srgbClr val="F0DCBC"/>
             </a:solidFill>
             <a:prstDash val="solid"/>
           </a:ln>
           <a:effectLst>
-            <a:outerShdw sx="100000" sy="100000" kx="0" ky="0" algn="bl" rotWithShape="0" blurRad="127000" dist="25400" dir="5400000">
-              <a:srgbClr val="9A8C7A">
-                <a:alpha val="10000"/>
+            <a:outerShdw sx="100000" sy="100000" kx="0" ky="0" algn="bl" rotWithShape="0" blurRad="152400" dist="25400" dir="5400000">
+              <a:srgbClr val="C99A5E">
+                <a:alpha val="14000"/>
               </a:srgbClr>
             </a:outerShdw>
           </a:effectLst>
@@ -11921,7 +11998,7 @@
             <a:r>
               <a:rPr lang="en-US" sz="1300" b="1" spc="100" kern="0" dirty="0">
                 <a:solidFill>
-                  <a:srgbClr val="E63329"/>
+                  <a:srgbClr val="F03A21"/>
                 </a:solidFill>
                 <a:latin typeface="Microsoft YaHei" pitchFamily="34" charset="0"/>
                 <a:ea typeface="Microsoft YaHei" pitchFamily="34" charset="-122"/>
@@ -12005,7 +12082,7 @@
             <a:r>
               <a:rPr lang="en-US" sz="1250" dirty="0">
                 <a:solidFill>
-                  <a:srgbClr val="3A332E"/>
+                  <a:srgbClr val="4A3B2C"/>
                 </a:solidFill>
                 <a:latin typeface="Microsoft YaHei" pitchFamily="34" charset="0"/>
                 <a:ea typeface="Microsoft YaHei" pitchFamily="34" charset="-122"/>
@@ -12025,7 +12102,7 @@
             <a:r>
               <a:rPr lang="en-US" sz="1250" dirty="0">
                 <a:solidFill>
-                  <a:srgbClr val="3A332E"/>
+                  <a:srgbClr val="4A3B2C"/>
                 </a:solidFill>
                 <a:latin typeface="Microsoft YaHei" pitchFamily="34" charset="0"/>
                 <a:ea typeface="Microsoft YaHei" pitchFamily="34" charset="-122"/>
@@ -12058,14 +12135,14 @@
           </a:solidFill>
           <a:ln w="12700">
             <a:solidFill>
-              <a:srgbClr val="E2D9CC"/>
+              <a:srgbClr val="F0DCBC"/>
             </a:solidFill>
             <a:prstDash val="solid"/>
           </a:ln>
           <a:effectLst>
-            <a:outerShdw sx="100000" sy="100000" kx="0" ky="0" algn="bl" rotWithShape="0" blurRad="127000" dist="25400" dir="5400000">
-              <a:srgbClr val="9A8C7A">
-                <a:alpha val="10000"/>
+            <a:outerShdw sx="100000" sy="100000" kx="0" ky="0" algn="bl" rotWithShape="0" blurRad="152400" dist="25400" dir="5400000">
+              <a:srgbClr val="C99A5E">
+                <a:alpha val="14000"/>
               </a:srgbClr>
             </a:outerShdw>
           </a:effectLst>
@@ -12098,7 +12175,7 @@
             <a:r>
               <a:rPr lang="en-US" sz="1300" b="1" spc="100" kern="0" dirty="0">
                 <a:solidFill>
-                  <a:srgbClr val="E63329"/>
+                  <a:srgbClr val="F03A21"/>
                 </a:solidFill>
                 <a:latin typeface="Microsoft YaHei" pitchFamily="34" charset="0"/>
                 <a:ea typeface="Microsoft YaHei" pitchFamily="34" charset="-122"/>
@@ -12182,7 +12259,7 @@
             <a:r>
               <a:rPr lang="en-US" sz="1250" dirty="0">
                 <a:solidFill>
-                  <a:srgbClr val="3A332E"/>
+                  <a:srgbClr val="4A3B2C"/>
                 </a:solidFill>
                 <a:latin typeface="Microsoft YaHei" pitchFamily="34" charset="0"/>
                 <a:ea typeface="Microsoft YaHei" pitchFamily="34" charset="-122"/>
@@ -12202,7 +12279,7 @@
             <a:r>
               <a:rPr lang="en-US" sz="1250" dirty="0">
                 <a:solidFill>
-                  <a:srgbClr val="3A332E"/>
+                  <a:srgbClr val="4A3B2C"/>
                 </a:solidFill>
                 <a:latin typeface="Microsoft YaHei" pitchFamily="34" charset="0"/>
                 <a:ea typeface="Microsoft YaHei" pitchFamily="34" charset="-122"/>
@@ -12235,14 +12312,14 @@
           </a:solidFill>
           <a:ln w="12700">
             <a:solidFill>
-              <a:srgbClr val="E2D9CC"/>
+              <a:srgbClr val="F0DCBC"/>
             </a:solidFill>
             <a:prstDash val="solid"/>
           </a:ln>
           <a:effectLst>
-            <a:outerShdw sx="100000" sy="100000" kx="0" ky="0" algn="bl" rotWithShape="0" blurRad="127000" dist="25400" dir="5400000">
-              <a:srgbClr val="9A8C7A">
-                <a:alpha val="10000"/>
+            <a:outerShdw sx="100000" sy="100000" kx="0" ky="0" algn="bl" rotWithShape="0" blurRad="152400" dist="25400" dir="5400000">
+              <a:srgbClr val="C99A5E">
+                <a:alpha val="14000"/>
               </a:srgbClr>
             </a:outerShdw>
           </a:effectLst>
@@ -12275,7 +12352,7 @@
             <a:r>
               <a:rPr lang="en-US" sz="1300" b="1" spc="100" kern="0" dirty="0">
                 <a:solidFill>
-                  <a:srgbClr val="E63329"/>
+                  <a:srgbClr val="F03A21"/>
                 </a:solidFill>
                 <a:latin typeface="Microsoft YaHei" pitchFamily="34" charset="0"/>
                 <a:ea typeface="Microsoft YaHei" pitchFamily="34" charset="-122"/>
@@ -12359,7 +12436,7 @@
             <a:r>
               <a:rPr lang="en-US" sz="1250" dirty="0">
                 <a:solidFill>
-                  <a:srgbClr val="3A332E"/>
+                  <a:srgbClr val="4A3B2C"/>
                 </a:solidFill>
                 <a:latin typeface="Microsoft YaHei" pitchFamily="34" charset="0"/>
                 <a:ea typeface="Microsoft YaHei" pitchFamily="34" charset="-122"/>
@@ -12379,7 +12456,7 @@
             <a:r>
               <a:rPr lang="en-US" sz="1250" dirty="0">
                 <a:solidFill>
-                  <a:srgbClr val="3A332E"/>
+                  <a:srgbClr val="4A3B2C"/>
                 </a:solidFill>
                 <a:latin typeface="Microsoft YaHei" pitchFamily="34" charset="0"/>
                 <a:ea typeface="Microsoft YaHei" pitchFamily="34" charset="-122"/>
@@ -12412,14 +12489,14 @@
           </a:solidFill>
           <a:ln w="12700">
             <a:solidFill>
-              <a:srgbClr val="E2D9CC"/>
+              <a:srgbClr val="F0DCBC"/>
             </a:solidFill>
             <a:prstDash val="solid"/>
           </a:ln>
           <a:effectLst>
-            <a:outerShdw sx="100000" sy="100000" kx="0" ky="0" algn="bl" rotWithShape="0" blurRad="127000" dist="25400" dir="5400000">
-              <a:srgbClr val="9A8C7A">
-                <a:alpha val="10000"/>
+            <a:outerShdw sx="100000" sy="100000" kx="0" ky="0" algn="bl" rotWithShape="0" blurRad="152400" dist="25400" dir="5400000">
+              <a:srgbClr val="C99A5E">
+                <a:alpha val="14000"/>
               </a:srgbClr>
             </a:outerShdw>
           </a:effectLst>
@@ -12452,7 +12529,7 @@
             <a:r>
               <a:rPr lang="en-US" sz="1300" b="1" spc="100" kern="0" dirty="0">
                 <a:solidFill>
-                  <a:srgbClr val="E63329"/>
+                  <a:srgbClr val="F03A21"/>
                 </a:solidFill>
                 <a:latin typeface="Microsoft YaHei" pitchFamily="34" charset="0"/>
                 <a:ea typeface="Microsoft YaHei" pitchFamily="34" charset="-122"/>
@@ -12536,7 +12613,7 @@
             <a:r>
               <a:rPr lang="en-US" sz="1250" dirty="0">
                 <a:solidFill>
-                  <a:srgbClr val="3A332E"/>
+                  <a:srgbClr val="4A3B2C"/>
                 </a:solidFill>
                 <a:latin typeface="Microsoft YaHei" pitchFamily="34" charset="0"/>
                 <a:ea typeface="Microsoft YaHei" pitchFamily="34" charset="-122"/>
@@ -12556,7 +12633,7 @@
             <a:r>
               <a:rPr lang="en-US" sz="1250" dirty="0">
                 <a:solidFill>
-                  <a:srgbClr val="3A332E"/>
+                  <a:srgbClr val="4A3B2C"/>
                 </a:solidFill>
                 <a:latin typeface="Microsoft YaHei" pitchFamily="34" charset="0"/>
                 <a:ea typeface="Microsoft YaHei" pitchFamily="34" charset="-122"/>
@@ -12589,14 +12666,14 @@
           </a:solidFill>
           <a:ln w="12700">
             <a:solidFill>
-              <a:srgbClr val="E2D9CC"/>
+              <a:srgbClr val="F0DCBC"/>
             </a:solidFill>
             <a:prstDash val="solid"/>
           </a:ln>
           <a:effectLst>
-            <a:outerShdw sx="100000" sy="100000" kx="0" ky="0" algn="bl" rotWithShape="0" blurRad="127000" dist="25400" dir="5400000">
-              <a:srgbClr val="9A8C7A">
-                <a:alpha val="10000"/>
+            <a:outerShdw sx="100000" sy="100000" kx="0" ky="0" algn="bl" rotWithShape="0" blurRad="152400" dist="25400" dir="5400000">
+              <a:srgbClr val="C99A5E">
+                <a:alpha val="14000"/>
               </a:srgbClr>
             </a:outerShdw>
           </a:effectLst>
@@ -12629,7 +12706,7 @@
             <a:r>
               <a:rPr lang="en-US" sz="1300" b="1" spc="100" kern="0" dirty="0">
                 <a:solidFill>
-                  <a:srgbClr val="E63329"/>
+                  <a:srgbClr val="F03A21"/>
                 </a:solidFill>
                 <a:latin typeface="Microsoft YaHei" pitchFamily="34" charset="0"/>
                 <a:ea typeface="Microsoft YaHei" pitchFamily="34" charset="-122"/>
@@ -12713,7 +12790,7 @@
             <a:r>
               <a:rPr lang="en-US" sz="1250" dirty="0">
                 <a:solidFill>
-                  <a:srgbClr val="3A332E"/>
+                  <a:srgbClr val="4A3B2C"/>
                 </a:solidFill>
                 <a:latin typeface="Microsoft YaHei" pitchFamily="34" charset="0"/>
                 <a:ea typeface="Microsoft YaHei" pitchFamily="34" charset="-122"/>
@@ -12733,7 +12810,7 @@
             <a:r>
               <a:rPr lang="en-US" sz="1250" dirty="0">
                 <a:solidFill>
-                  <a:srgbClr val="3A332E"/>
+                  <a:srgbClr val="4A3B2C"/>
                 </a:solidFill>
                 <a:latin typeface="Microsoft YaHei" pitchFamily="34" charset="0"/>
                 <a:ea typeface="Microsoft YaHei" pitchFamily="34" charset="-122"/>
@@ -12799,7 +12876,7 @@
             <a:avLst/>
           </a:prstGeom>
           <a:solidFill>
-            <a:srgbClr val="FFC93C"/>
+            <a:srgbClr val="FFD24A"/>
           </a:solidFill>
           <a:ln/>
         </p:spPr>
@@ -12831,7 +12908,7 @@
             <a:r>
               <a:rPr lang="en-US" sz="1200" b="1" spc="200" kern="0" dirty="0">
                 <a:solidFill>
-                  <a:srgbClr val="F2E4D2"/>
+                  <a:srgbClr val="FFF0D4"/>
                 </a:solidFill>
                 <a:latin typeface="Microsoft YaHei" pitchFamily="34" charset="0"/>
                 <a:ea typeface="Microsoft YaHei" pitchFamily="34" charset="-122"/>
@@ -12859,6 +12936,13 @@
           </a:prstGeom>
           <a:noFill/>
           <a:ln/>
+          <a:effectLst>
+            <a:outerShdw sx="100000" sy="100000" kx="0" ky="0" algn="bl" rotWithShape="0" blurRad="152400" dist="25400" dir="5400000">
+              <a:srgbClr val="5A1A00">
+                <a:alpha val="42000"/>
+              </a:srgbClr>
+            </a:outerShdw>
+          </a:effectLst>
         </p:spPr>
         <p:txBody>
           <a:bodyPr wrap="square" lIns="0" tIns="0" rIns="0" bIns="0" rtlCol="0" anchor="ctr"/>
@@ -12921,6 +13005,13 @@
           </a:prstGeom>
           <a:noFill/>
           <a:ln/>
+          <a:effectLst>
+            <a:outerShdw sx="100000" sy="100000" kx="0" ky="0" algn="bl" rotWithShape="0" blurRad="88900" dist="25400" dir="5400000">
+              <a:srgbClr val="5A1A00">
+                <a:alpha val="50000"/>
+              </a:srgbClr>
+            </a:outerShdw>
+          </a:effectLst>
         </p:spPr>
         <p:txBody>
           <a:bodyPr wrap="square" lIns="0" tIns="0" rIns="0" bIns="0" rtlCol="0" anchor="t"/>
@@ -12928,14 +13019,14 @@
           <a:p>
             <a:pPr indent="0" marL="0">
               <a:lnSpc>
-                <a:spcPts val="2500"/>
+                <a:spcPts val="2600"/>
               </a:lnSpc>
               <a:buNone/>
             </a:pPr>
             <a:r>
-              <a:rPr lang="en-US" sz="1600" dirty="0">
-                <a:solidFill>
-                  <a:srgbClr val="FFE3C9"/>
+              <a:rPr lang="en-US" sz="1650" dirty="0">
+                <a:solidFill>
+                  <a:srgbClr val="FFFFFF"/>
                 </a:solidFill>
                 <a:latin typeface="Microsoft YaHei" pitchFamily="34" charset="0"/>
                 <a:ea typeface="Microsoft YaHei" pitchFamily="34" charset="-122"/>
@@ -12943,7 +13034,7 @@
               </a:rPr>
               <a:t>一个有抽卡系统的自律 App，其它地方做得越精致，伤害越大 —— 因为更多人会留下来被它伤到。平均分会把它藏起来，红线不会。</a:t>
             </a:r>
-            <a:endParaRPr lang="en-US" sz="1600" dirty="0"/>
+            <a:endParaRPr lang="en-US" sz="1650" dirty="0"/>
           </a:p>
         </p:txBody>
       </p:sp>
@@ -13001,7 +13092,7 @@
             <a:avLst/>
           </a:prstGeom>
           <a:solidFill>
-            <a:srgbClr val="FF7A1A"/>
+            <a:srgbClr val="FF8A1E"/>
           </a:solidFill>
           <a:ln/>
         </p:spPr>
@@ -13033,7 +13124,7 @@
             <a:r>
               <a:rPr lang="en-US" sz="1200" b="1" spc="200" kern="0" dirty="0">
                 <a:solidFill>
-                  <a:srgbClr val="7A736C"/>
+                  <a:srgbClr val="9A7550"/>
                 </a:solidFill>
                 <a:latin typeface="Microsoft YaHei" pitchFamily="34" charset="0"/>
                 <a:ea typeface="Microsoft YaHei" pitchFamily="34" charset="-122"/>
@@ -13111,7 +13202,7 @@
             <a:r>
               <a:rPr lang="en-US" sz="1600" dirty="0">
                 <a:solidFill>
-                  <a:srgbClr val="7A736C"/>
+                  <a:srgbClr val="9A7550"/>
                 </a:solidFill>
                 <a:latin typeface="Microsoft YaHei" pitchFamily="34" charset="0"/>
                 <a:ea typeface="Microsoft YaHei" pitchFamily="34" charset="-122"/>
@@ -13150,7 +13241,7 @@
             <a:r>
               <a:rPr lang="en-US" sz="1100" dirty="0">
                 <a:solidFill>
-                  <a:srgbClr val="7A736C"/>
+                  <a:srgbClr val="9A7550"/>
                 </a:solidFill>
                 <a:latin typeface="Microsoft YaHei" pitchFamily="34" charset="0"/>
                 <a:ea typeface="Microsoft YaHei" pitchFamily="34" charset="-122"/>
@@ -13183,14 +13274,14 @@
           </a:solidFill>
           <a:ln w="12700">
             <a:solidFill>
-              <a:srgbClr val="E2D9CC"/>
+              <a:srgbClr val="F0DCBC"/>
             </a:solidFill>
             <a:prstDash val="solid"/>
           </a:ln>
           <a:effectLst>
-            <a:outerShdw sx="100000" sy="100000" kx="0" ky="0" algn="bl" rotWithShape="0" blurRad="127000" dist="25400" dir="5400000">
-              <a:srgbClr val="9A8C7A">
-                <a:alpha val="10000"/>
+            <a:outerShdw sx="100000" sy="100000" kx="0" ky="0" algn="bl" rotWithShape="0" blurRad="152400" dist="25400" dir="5400000">
+              <a:srgbClr val="C99A5E">
+                <a:alpha val="14000"/>
               </a:srgbClr>
             </a:outerShdw>
           </a:effectLst>
@@ -13307,7 +13398,7 @@
             <a:r>
               <a:rPr lang="en-US" sz="1300" dirty="0">
                 <a:solidFill>
-                  <a:srgbClr val="3A332E"/>
+                  <a:srgbClr val="4A3B2C"/>
                 </a:solidFill>
                 <a:latin typeface="Microsoft YaHei" pitchFamily="34" charset="0"/>
                 <a:ea typeface="Microsoft YaHei" pitchFamily="34" charset="-122"/>
@@ -13336,7 +13427,7 @@
             <a:r>
               <a:rPr lang="en-US" sz="1300" dirty="0">
                 <a:solidFill>
-                  <a:srgbClr val="3A332E"/>
+                  <a:srgbClr val="4A3B2C"/>
                 </a:solidFill>
                 <a:latin typeface="Microsoft YaHei" pitchFamily="34" charset="0"/>
                 <a:ea typeface="Microsoft YaHei" pitchFamily="34" charset="-122"/>
@@ -13369,14 +13460,14 @@
           </a:solidFill>
           <a:ln w="12700">
             <a:solidFill>
-              <a:srgbClr val="E2D9CC"/>
+              <a:srgbClr val="F0DCBC"/>
             </a:solidFill>
             <a:prstDash val="solid"/>
           </a:ln>
           <a:effectLst>
-            <a:outerShdw sx="100000" sy="100000" kx="0" ky="0" algn="bl" rotWithShape="0" blurRad="127000" dist="25400" dir="5400000">
-              <a:srgbClr val="9A8C7A">
-                <a:alpha val="10000"/>
+            <a:outerShdw sx="100000" sy="100000" kx="0" ky="0" algn="bl" rotWithShape="0" blurRad="152400" dist="25400" dir="5400000">
+              <a:srgbClr val="C99A5E">
+                <a:alpha val="14000"/>
               </a:srgbClr>
             </a:outerShdw>
           </a:effectLst>
@@ -13493,7 +13584,7 @@
             <a:r>
               <a:rPr lang="en-US" sz="1300" dirty="0">
                 <a:solidFill>
-                  <a:srgbClr val="3A332E"/>
+                  <a:srgbClr val="4A3B2C"/>
                 </a:solidFill>
                 <a:latin typeface="Microsoft YaHei" pitchFamily="34" charset="0"/>
                 <a:ea typeface="Microsoft YaHei" pitchFamily="34" charset="-122"/>
@@ -13522,7 +13613,7 @@
             <a:r>
               <a:rPr lang="en-US" sz="1300" dirty="0">
                 <a:solidFill>
-                  <a:srgbClr val="3A332E"/>
+                  <a:srgbClr val="4A3B2C"/>
                 </a:solidFill>
                 <a:latin typeface="Microsoft YaHei" pitchFamily="34" charset="0"/>
                 <a:ea typeface="Microsoft YaHei" pitchFamily="34" charset="-122"/>
@@ -13555,14 +13646,14 @@
           </a:solidFill>
           <a:ln w="12700">
             <a:solidFill>
-              <a:srgbClr val="E2D9CC"/>
+              <a:srgbClr val="F0DCBC"/>
             </a:solidFill>
             <a:prstDash val="solid"/>
           </a:ln>
           <a:effectLst>
-            <a:outerShdw sx="100000" sy="100000" kx="0" ky="0" algn="bl" rotWithShape="0" blurRad="127000" dist="25400" dir="5400000">
-              <a:srgbClr val="9A8C7A">
-                <a:alpha val="10000"/>
+            <a:outerShdw sx="100000" sy="100000" kx="0" ky="0" algn="bl" rotWithShape="0" blurRad="152400" dist="25400" dir="5400000">
+              <a:srgbClr val="C99A5E">
+                <a:alpha val="14000"/>
               </a:srgbClr>
             </a:outerShdw>
           </a:effectLst>
@@ -13595,7 +13686,7 @@
             <a:r>
               <a:rPr lang="en-US" sz="1300" b="1" spc="100" kern="0" dirty="0">
                 <a:solidFill>
-                  <a:srgbClr val="FF7A1A"/>
+                  <a:srgbClr val="FF8A1E"/>
                 </a:solidFill>
                 <a:latin typeface="Microsoft YaHei" pitchFamily="34" charset="0"/>
                 <a:ea typeface="Microsoft YaHei" pitchFamily="34" charset="-122"/>
@@ -13679,7 +13770,7 @@
             <a:r>
               <a:rPr lang="en-US" sz="1300" dirty="0">
                 <a:solidFill>
-                  <a:srgbClr val="3A332E"/>
+                  <a:srgbClr val="4A3B2C"/>
                 </a:solidFill>
                 <a:latin typeface="Microsoft YaHei" pitchFamily="34" charset="0"/>
                 <a:ea typeface="Microsoft YaHei" pitchFamily="34" charset="-122"/>
@@ -13708,7 +13799,7 @@
             <a:r>
               <a:rPr lang="en-US" sz="1300" dirty="0">
                 <a:solidFill>
-                  <a:srgbClr val="3A332E"/>
+                  <a:srgbClr val="4A3B2C"/>
                 </a:solidFill>
                 <a:latin typeface="Microsoft YaHei" pitchFamily="34" charset="0"/>
                 <a:ea typeface="Microsoft YaHei" pitchFamily="34" charset="-122"/>
@@ -13741,14 +13832,14 @@
           </a:solidFill>
           <a:ln w="12700">
             <a:solidFill>
-              <a:srgbClr val="E2D9CC"/>
+              <a:srgbClr val="F0DCBC"/>
             </a:solidFill>
             <a:prstDash val="solid"/>
           </a:ln>
           <a:effectLst>
-            <a:outerShdw sx="100000" sy="100000" kx="0" ky="0" algn="bl" rotWithShape="0" blurRad="127000" dist="25400" dir="5400000">
-              <a:srgbClr val="9A8C7A">
-                <a:alpha val="10000"/>
+            <a:outerShdw sx="100000" sy="100000" kx="0" ky="0" algn="bl" rotWithShape="0" blurRad="152400" dist="25400" dir="5400000">
+              <a:srgbClr val="C99A5E">
+                <a:alpha val="14000"/>
               </a:srgbClr>
             </a:outerShdw>
           </a:effectLst>
@@ -13865,7 +13956,7 @@
             <a:r>
               <a:rPr lang="en-US" sz="1300" dirty="0">
                 <a:solidFill>
-                  <a:srgbClr val="3A332E"/>
+                  <a:srgbClr val="4A3B2C"/>
                 </a:solidFill>
                 <a:latin typeface="Microsoft YaHei" pitchFamily="34" charset="0"/>
                 <a:ea typeface="Microsoft YaHei" pitchFamily="34" charset="-122"/>
@@ -13894,7 +13985,7 @@
             <a:r>
               <a:rPr lang="en-US" sz="1300" dirty="0">
                 <a:solidFill>
-                  <a:srgbClr val="3A332E"/>
+                  <a:srgbClr val="4A3B2C"/>
                 </a:solidFill>
                 <a:latin typeface="Microsoft YaHei" pitchFamily="34" charset="0"/>
                 <a:ea typeface="Microsoft YaHei" pitchFamily="34" charset="-122"/>
@@ -13927,14 +14018,14 @@
           </a:solidFill>
           <a:ln w="12700">
             <a:solidFill>
-              <a:srgbClr val="E2D9CC"/>
+              <a:srgbClr val="F0DCBC"/>
             </a:solidFill>
             <a:prstDash val="solid"/>
           </a:ln>
           <a:effectLst>
-            <a:outerShdw sx="100000" sy="100000" kx="0" ky="0" algn="bl" rotWithShape="0" blurRad="127000" dist="25400" dir="5400000">
-              <a:srgbClr val="9A8C7A">
-                <a:alpha val="10000"/>
+            <a:outerShdw sx="100000" sy="100000" kx="0" ky="0" algn="bl" rotWithShape="0" blurRad="152400" dist="25400" dir="5400000">
+              <a:srgbClr val="C99A5E">
+                <a:alpha val="14000"/>
               </a:srgbClr>
             </a:outerShdw>
           </a:effectLst>
@@ -14051,7 +14142,7 @@
             <a:r>
               <a:rPr lang="en-US" sz="1300" dirty="0">
                 <a:solidFill>
-                  <a:srgbClr val="3A332E"/>
+                  <a:srgbClr val="4A3B2C"/>
                 </a:solidFill>
                 <a:latin typeface="Microsoft YaHei" pitchFamily="34" charset="0"/>
                 <a:ea typeface="Microsoft YaHei" pitchFamily="34" charset="-122"/>
@@ -14080,7 +14171,7 @@
             <a:r>
               <a:rPr lang="en-US" sz="1300" dirty="0">
                 <a:solidFill>
-                  <a:srgbClr val="3A332E"/>
+                  <a:srgbClr val="4A3B2C"/>
                 </a:solidFill>
                 <a:latin typeface="Microsoft YaHei" pitchFamily="34" charset="0"/>
                 <a:ea typeface="Microsoft YaHei" pitchFamily="34" charset="-122"/>
